--- a/claude_code_full.pptx
+++ b/claude_code_full.pptx
@@ -28,6 +28,7 @@
     <p:sldId id="276" r:id="rId27"/>
     <p:sldId id="277" r:id="rId28"/>
     <p:sldId id="278" r:id="rId29"/>
+    <p:sldId id="279" r:id="rId30"/>
   </p:sldIdLst>
   <p:sldSz cx="12188952" cy="6858000" type="screen4x3"/>
   <p:notesSz cx="6858000" cy="9144000"/>
@@ -3438,7 +3439,7 @@
                   <a:srgbClr val="1A222E"/>
                 </a:solidFill>
               </a:rPr>
-              <a:t>01  Agent Architecture — ReAct Loop</a:t>
+              <a:t>03  Agent Architecture — ReAct Loop</a:t>
             </a:r>
           </a:p>
         </p:txBody>
@@ -4442,41 +4443,75 @@
         </p:nvSpPr>
         <p:spPr>
           <a:xfrm>
-            <a:off x="502920" y="164592"/>
-            <a:ext cx="11155680" cy="640080"/>
-          </a:xfrm>
-          <a:prstGeom prst="rect">
-            <a:avLst/>
-          </a:prstGeom>
-          <a:noFill/>
-        </p:spPr>
-        <p:txBody>
-          <a:bodyPr wrap="square">
-            <a:spAutoFit/>
-          </a:bodyPr>
-          <a:lstStyle/>
-          <a:p>
-            <a:pPr algn="l"/>
-            <a:r>
-              <a:rPr sz="2600" b="1" i="0">
+            <a:off x="502920" y="146304"/>
+            <a:ext cx="11155680" cy="475488"/>
+          </a:xfrm>
+          <a:prstGeom prst="rect">
+            <a:avLst/>
+          </a:prstGeom>
+          <a:noFill/>
+        </p:spPr>
+        <p:txBody>
+          <a:bodyPr wrap="square">
+            <a:spAutoFit/>
+          </a:bodyPr>
+          <a:lstStyle/>
+          <a:p>
+            <a:pPr algn="l"/>
+            <a:r>
+              <a:rPr sz="2400" b="1" i="0">
                 <a:solidFill>
                   <a:srgbClr val="1A222E"/>
                 </a:solidFill>
               </a:rPr>
-              <a:t>02  工具總覽 (1/2) — 核心工具</a:t>
-            </a:r>
-          </a:p>
-        </p:txBody>
-      </p:sp>
-      <p:sp>
-        <p:nvSpPr>
-          <p:cNvPr id="4" name="Rectangle 3"/>
+              <a:t>04  工具總覽 (1/2) — 核心工具</a:t>
+            </a:r>
+          </a:p>
+        </p:txBody>
+      </p:sp>
+      <p:sp>
+        <p:nvSpPr>
+          <p:cNvPr id="4" name="TextBox 3"/>
+          <p:cNvSpPr txBox="1"/>
+          <p:nvPr/>
+        </p:nvSpPr>
+        <p:spPr>
+          <a:xfrm>
+            <a:off x="502920" y="640080"/>
+            <a:ext cx="11155680" cy="274320"/>
+          </a:xfrm>
+          <a:prstGeom prst="rect">
+            <a:avLst/>
+          </a:prstGeom>
+          <a:noFill/>
+        </p:spPr>
+        <p:txBody>
+          <a:bodyPr wrap="square">
+            <a:spAutoFit/>
+          </a:bodyPr>
+          <a:lstStyle/>
+          <a:p>
+            <a:pPr algn="l"/>
+            <a:r>
+              <a:rPr sz="1300" b="0" i="1">
+                <a:solidFill>
+                  <a:srgbClr val="55657A"/>
+                </a:solidFill>
+              </a:rPr>
+              <a:t>★ = auto-allow，預設直接執行不詢問</a:t>
+            </a:r>
+          </a:p>
+        </p:txBody>
+      </p:sp>
+      <p:sp>
+        <p:nvSpPr>
+          <p:cNvPr id="5" name="Rectangle 4"/>
           <p:cNvSpPr/>
           <p:nvPr/>
         </p:nvSpPr>
         <p:spPr>
           <a:xfrm>
-            <a:off x="457200" y="914400"/>
+            <a:off x="457200" y="950976"/>
             <a:ext cx="11274552" cy="41148"/>
           </a:xfrm>
           <a:prstGeom prst="rect">
@@ -4508,40 +4543,6 @@
           <a:lstStyle/>
           <a:p>
             <a:pPr algn="ctr"/>
-          </a:p>
-        </p:txBody>
-      </p:sp>
-      <p:sp>
-        <p:nvSpPr>
-          <p:cNvPr id="5" name="TextBox 4"/>
-          <p:cNvSpPr txBox="1"/>
-          <p:nvPr/>
-        </p:nvSpPr>
-        <p:spPr>
-          <a:xfrm>
-            <a:off x="502920" y="987552"/>
-            <a:ext cx="10972800" cy="384048"/>
-          </a:xfrm>
-          <a:prstGeom prst="rect">
-            <a:avLst/>
-          </a:prstGeom>
-          <a:noFill/>
-        </p:spPr>
-        <p:txBody>
-          <a:bodyPr wrap="square">
-            <a:spAutoFit/>
-          </a:bodyPr>
-          <a:lstStyle/>
-          <a:p>
-            <a:pPr algn="l"/>
-            <a:r>
-              <a:rPr sz="1400" b="0" i="1">
-                <a:solidFill>
-                  <a:srgbClr val="55657A"/>
-                </a:solidFill>
-              </a:rPr>
-              <a:t>★ = auto-allow，預設直接執行不詢問</a:t>
-            </a:r>
           </a:p>
         </p:txBody>
       </p:sp>
@@ -6222,7 +6223,7 @@
                   <a:srgbClr val="1A222E"/>
                 </a:solidFill>
               </a:rPr>
-              <a:t>02  工具總覽 (2/2) — 系統與擴充工具</a:t>
+              <a:t>04  工具總覽 (2/2) — 系統與擴充工具</a:t>
             </a:r>
           </a:p>
         </p:txBody>
@@ -7919,41 +7920,75 @@
         </p:nvSpPr>
         <p:spPr>
           <a:xfrm>
-            <a:off x="502920" y="164592"/>
-            <a:ext cx="11155680" cy="640080"/>
-          </a:xfrm>
-          <a:prstGeom prst="rect">
-            <a:avLst/>
-          </a:prstGeom>
-          <a:noFill/>
-        </p:spPr>
-        <p:txBody>
-          <a:bodyPr wrap="square">
-            <a:spAutoFit/>
-          </a:bodyPr>
-          <a:lstStyle/>
-          <a:p>
-            <a:pPr algn="l"/>
-            <a:r>
-              <a:rPr sz="2600" b="1" i="0">
+            <a:off x="502920" y="146304"/>
+            <a:ext cx="11155680" cy="475488"/>
+          </a:xfrm>
+          <a:prstGeom prst="rect">
+            <a:avLst/>
+          </a:prstGeom>
+          <a:noFill/>
+        </p:spPr>
+        <p:txBody>
+          <a:bodyPr wrap="square">
+            <a:spAutoFit/>
+          </a:bodyPr>
+          <a:lstStyle/>
+          <a:p>
+            <a:pPr algn="l"/>
+            <a:r>
+              <a:rPr sz="2400" b="1" i="0">
                 <a:solidFill>
                   <a:srgbClr val="1A222E"/>
                 </a:solidFill>
               </a:rPr>
-              <a:t>03  工具深入 — Read / Grep / Glob</a:t>
-            </a:r>
-          </a:p>
-        </p:txBody>
-      </p:sp>
-      <p:sp>
-        <p:nvSpPr>
-          <p:cNvPr id="4" name="Rectangle 3"/>
+              <a:t>05  工具深入 — Read / Grep / Glob</a:t>
+            </a:r>
+          </a:p>
+        </p:txBody>
+      </p:sp>
+      <p:sp>
+        <p:nvSpPr>
+          <p:cNvPr id="4" name="TextBox 3"/>
+          <p:cNvSpPr txBox="1"/>
+          <p:nvPr/>
+        </p:nvSpPr>
+        <p:spPr>
+          <a:xfrm>
+            <a:off x="502920" y="640080"/>
+            <a:ext cx="11155680" cy="274320"/>
+          </a:xfrm>
+          <a:prstGeom prst="rect">
+            <a:avLst/>
+          </a:prstGeom>
+          <a:noFill/>
+        </p:spPr>
+        <p:txBody>
+          <a:bodyPr wrap="square">
+            <a:spAutoFit/>
+          </a:bodyPr>
+          <a:lstStyle/>
+          <a:p>
+            <a:pPr algn="l"/>
+            <a:r>
+              <a:rPr sz="1300" b="0" i="1">
+                <a:solidFill>
+                  <a:srgbClr val="55657A"/>
+                </a:solidFill>
+              </a:rPr>
+              <a:t>同樣 auto-allow 且唯讀，但設計定位不同，不要用 Bash 代替</a:t>
+            </a:r>
+          </a:p>
+        </p:txBody>
+      </p:sp>
+      <p:sp>
+        <p:nvSpPr>
+          <p:cNvPr id="5" name="Rectangle 4"/>
           <p:cNvSpPr/>
           <p:nvPr/>
         </p:nvSpPr>
         <p:spPr>
           <a:xfrm>
-            <a:off x="457200" y="914400"/>
+            <a:off x="457200" y="950976"/>
             <a:ext cx="11274552" cy="41148"/>
           </a:xfrm>
           <a:prstGeom prst="rect">
@@ -7985,40 +8020,6 @@
           <a:lstStyle/>
           <a:p>
             <a:pPr algn="ctr"/>
-          </a:p>
-        </p:txBody>
-      </p:sp>
-      <p:sp>
-        <p:nvSpPr>
-          <p:cNvPr id="5" name="TextBox 4"/>
-          <p:cNvSpPr txBox="1"/>
-          <p:nvPr/>
-        </p:nvSpPr>
-        <p:spPr>
-          <a:xfrm>
-            <a:off x="502920" y="987552"/>
-            <a:ext cx="10972800" cy="384048"/>
-          </a:xfrm>
-          <a:prstGeom prst="rect">
-            <a:avLst/>
-          </a:prstGeom>
-          <a:noFill/>
-        </p:spPr>
-        <p:txBody>
-          <a:bodyPr wrap="square">
-            <a:spAutoFit/>
-          </a:bodyPr>
-          <a:lstStyle/>
-          <a:p>
-            <a:pPr algn="l"/>
-            <a:r>
-              <a:rPr sz="1400" b="0" i="1">
-                <a:solidFill>
-                  <a:srgbClr val="55657A"/>
-                </a:solidFill>
-              </a:rPr>
-              <a:t>同樣 auto-allow 且唯讀，但設計定位不同，不要用 Bash 代替</a:t>
-            </a:r>
           </a:p>
         </p:txBody>
       </p:sp>
@@ -9484,7 +9485,7 @@
                   <a:srgbClr val="1A222E"/>
                 </a:solidFill>
               </a:rPr>
-              <a:t>03  工具深入 — Edit vs Write</a:t>
+              <a:t>05  工具深入 — Edit vs Write</a:t>
             </a:r>
           </a:p>
         </p:txBody>
@@ -10735,41 +10736,75 @@
         </p:nvSpPr>
         <p:spPr>
           <a:xfrm>
-            <a:off x="502920" y="164592"/>
-            <a:ext cx="11155680" cy="640080"/>
-          </a:xfrm>
-          <a:prstGeom prst="rect">
-            <a:avLst/>
-          </a:prstGeom>
-          <a:noFill/>
-        </p:spPr>
-        <p:txBody>
-          <a:bodyPr wrap="square">
-            <a:spAutoFit/>
-          </a:bodyPr>
-          <a:lstStyle/>
-          <a:p>
-            <a:pPr algn="l"/>
-            <a:r>
-              <a:rPr sz="2600" b="1" i="0">
+            <a:off x="502920" y="146304"/>
+            <a:ext cx="11155680" cy="475488"/>
+          </a:xfrm>
+          <a:prstGeom prst="rect">
+            <a:avLst/>
+          </a:prstGeom>
+          <a:noFill/>
+        </p:spPr>
+        <p:txBody>
+          <a:bodyPr wrap="square">
+            <a:spAutoFit/>
+          </a:bodyPr>
+          <a:lstStyle/>
+          <a:p>
+            <a:pPr algn="l"/>
+            <a:r>
+              <a:rPr sz="2400" b="1" i="0">
                 <a:solidFill>
                   <a:srgbClr val="1A222E"/>
                 </a:solidFill>
               </a:rPr>
-              <a:t>03  工具深入 — Bash</a:t>
-            </a:r>
-          </a:p>
-        </p:txBody>
-      </p:sp>
-      <p:sp>
-        <p:nvSpPr>
-          <p:cNvPr id="4" name="Rectangle 3"/>
+              <a:t>05  工具深入 — Bash</a:t>
+            </a:r>
+          </a:p>
+        </p:txBody>
+      </p:sp>
+      <p:sp>
+        <p:nvSpPr>
+          <p:cNvPr id="4" name="TextBox 3"/>
+          <p:cNvSpPr txBox="1"/>
+          <p:nvPr/>
+        </p:nvSpPr>
+        <p:spPr>
+          <a:xfrm>
+            <a:off x="502920" y="640080"/>
+            <a:ext cx="11155680" cy="274320"/>
+          </a:xfrm>
+          <a:prstGeom prst="rect">
+            <a:avLst/>
+          </a:prstGeom>
+          <a:noFill/>
+        </p:spPr>
+        <p:txBody>
+          <a:bodyPr wrap="square">
+            <a:spAutoFit/>
+          </a:bodyPr>
+          <a:lstStyle/>
+          <a:p>
+            <a:pPr algn="l"/>
+            <a:r>
+              <a:rPr sz="1300" b="0" i="1">
+                <a:solidFill>
+                  <a:srgbClr val="55657A"/>
+                </a:solidFill>
+              </a:rPr>
+              <a:t>有專用工具時優先用專用工具；只有需要『執行』時才用 Bash</a:t>
+            </a:r>
+          </a:p>
+        </p:txBody>
+      </p:sp>
+      <p:sp>
+        <p:nvSpPr>
+          <p:cNvPr id="5" name="Rectangle 4"/>
           <p:cNvSpPr/>
           <p:nvPr/>
         </p:nvSpPr>
         <p:spPr>
           <a:xfrm>
-            <a:off x="457200" y="914400"/>
+            <a:off x="457200" y="950976"/>
             <a:ext cx="11274552" cy="41148"/>
           </a:xfrm>
           <a:prstGeom prst="rect">
@@ -10801,40 +10836,6 @@
           <a:lstStyle/>
           <a:p>
             <a:pPr algn="ctr"/>
-          </a:p>
-        </p:txBody>
-      </p:sp>
-      <p:sp>
-        <p:nvSpPr>
-          <p:cNvPr id="5" name="TextBox 4"/>
-          <p:cNvSpPr txBox="1"/>
-          <p:nvPr/>
-        </p:nvSpPr>
-        <p:spPr>
-          <a:xfrm>
-            <a:off x="502920" y="987552"/>
-            <a:ext cx="10972800" cy="384048"/>
-          </a:xfrm>
-          <a:prstGeom prst="rect">
-            <a:avLst/>
-          </a:prstGeom>
-          <a:noFill/>
-        </p:spPr>
-        <p:txBody>
-          <a:bodyPr wrap="square">
-            <a:spAutoFit/>
-          </a:bodyPr>
-          <a:lstStyle/>
-          <a:p>
-            <a:pPr algn="l"/>
-            <a:r>
-              <a:rPr sz="1400" b="0" i="1">
-                <a:solidFill>
-                  <a:srgbClr val="55657A"/>
-                </a:solidFill>
-              </a:rPr>
-              <a:t>有專用工具時優先用專用工具；只有需要『執行』時才用 Bash</a:t>
-            </a:r>
           </a:p>
         </p:txBody>
       </p:sp>
@@ -12639,41 +12640,75 @@
         </p:nvSpPr>
         <p:spPr>
           <a:xfrm>
-            <a:off x="502920" y="164592"/>
-            <a:ext cx="11155680" cy="640080"/>
-          </a:xfrm>
-          <a:prstGeom prst="rect">
-            <a:avLst/>
-          </a:prstGeom>
-          <a:noFill/>
-        </p:spPr>
-        <p:txBody>
-          <a:bodyPr wrap="square">
-            <a:spAutoFit/>
-          </a:bodyPr>
-          <a:lstStyle/>
-          <a:p>
-            <a:pPr algn="l"/>
-            <a:r>
-              <a:rPr sz="2600" b="1" i="0">
+            <a:off x="502920" y="146304"/>
+            <a:ext cx="11155680" cy="475488"/>
+          </a:xfrm>
+          <a:prstGeom prst="rect">
+            <a:avLst/>
+          </a:prstGeom>
+          <a:noFill/>
+        </p:spPr>
+        <p:txBody>
+          <a:bodyPr wrap="square">
+            <a:spAutoFit/>
+          </a:bodyPr>
+          <a:lstStyle/>
+          <a:p>
+            <a:pPr algn="l"/>
+            <a:r>
+              <a:rPr sz="2400" b="1" i="0">
                 <a:solidFill>
                   <a:srgbClr val="1A222E"/>
                 </a:solidFill>
               </a:rPr>
-              <a:t>03  工具深入 — ToolSearch</a:t>
-            </a:r>
-          </a:p>
-        </p:txBody>
-      </p:sp>
-      <p:sp>
-        <p:nvSpPr>
-          <p:cNvPr id="4" name="Rectangle 3"/>
+              <a:t>05  工具深入 — ToolSearch</a:t>
+            </a:r>
+          </a:p>
+        </p:txBody>
+      </p:sp>
+      <p:sp>
+        <p:nvSpPr>
+          <p:cNvPr id="4" name="TextBox 3"/>
+          <p:cNvSpPr txBox="1"/>
+          <p:nvPr/>
+        </p:nvSpPr>
+        <p:spPr>
+          <a:xfrm>
+            <a:off x="502920" y="640080"/>
+            <a:ext cx="11155680" cy="274320"/>
+          </a:xfrm>
+          <a:prstGeom prst="rect">
+            <a:avLst/>
+          </a:prstGeom>
+          <a:noFill/>
+        </p:spPr>
+        <p:txBody>
+          <a:bodyPr wrap="square">
+            <a:spAutoFit/>
+          </a:bodyPr>
+          <a:lstStyle/>
+          <a:p>
+            <a:pPr algn="l"/>
+            <a:r>
+              <a:rPr sz="1300" b="0" i="1">
+                <a:solidFill>
+                  <a:srgbClr val="55657A"/>
+                </a:solidFill>
+              </a:rPr>
+              <a:t>唯一預設載入的 meta 工具：讓其他工具的 schema 進入 context</a:t>
+            </a:r>
+          </a:p>
+        </p:txBody>
+      </p:sp>
+      <p:sp>
+        <p:nvSpPr>
+          <p:cNvPr id="5" name="Rectangle 4"/>
           <p:cNvSpPr/>
           <p:nvPr/>
         </p:nvSpPr>
         <p:spPr>
           <a:xfrm>
-            <a:off x="457200" y="914400"/>
+            <a:off x="457200" y="950976"/>
             <a:ext cx="11274552" cy="41148"/>
           </a:xfrm>
           <a:prstGeom prst="rect">
@@ -12705,40 +12740,6 @@
           <a:lstStyle/>
           <a:p>
             <a:pPr algn="ctr"/>
-          </a:p>
-        </p:txBody>
-      </p:sp>
-      <p:sp>
-        <p:nvSpPr>
-          <p:cNvPr id="5" name="TextBox 4"/>
-          <p:cNvSpPr txBox="1"/>
-          <p:nvPr/>
-        </p:nvSpPr>
-        <p:spPr>
-          <a:xfrm>
-            <a:off x="502920" y="987552"/>
-            <a:ext cx="10972800" cy="384048"/>
-          </a:xfrm>
-          <a:prstGeom prst="rect">
-            <a:avLst/>
-          </a:prstGeom>
-          <a:noFill/>
-        </p:spPr>
-        <p:txBody>
-          <a:bodyPr wrap="square">
-            <a:spAutoFit/>
-          </a:bodyPr>
-          <a:lstStyle/>
-          <a:p>
-            <a:pPr algn="l"/>
-            <a:r>
-              <a:rPr sz="1400" b="0" i="1">
-                <a:solidFill>
-                  <a:srgbClr val="55657A"/>
-                </a:solidFill>
-              </a:rPr>
-              <a:t>唯一預設載入的 meta 工具：讓其他工具的 schema 進入 context</a:t>
-            </a:r>
           </a:p>
         </p:txBody>
       </p:sp>
@@ -14168,7 +14169,7 @@
                   <a:srgbClr val="1A222E"/>
                 </a:solidFill>
               </a:rPr>
-              <a:t>04  工具深入 — Agent Tool（Subagent）</a:t>
+              <a:t>06  工具深入 — Agent Tool（Subagent）</a:t>
             </a:r>
           </a:p>
         </p:txBody>
@@ -15567,7 +15568,7 @@
                   <a:srgbClr val="1A222E"/>
                 </a:solidFill>
               </a:rPr>
-              <a:t>04  工具深入 — Skill 系統</a:t>
+              <a:t>06  工具深入 — Skill 系統</a:t>
             </a:r>
           </a:p>
         </p:txBody>
@@ -16306,41 +16307,75 @@
         </p:nvSpPr>
         <p:spPr>
           <a:xfrm>
-            <a:off x="502920" y="164592"/>
-            <a:ext cx="11155680" cy="640080"/>
-          </a:xfrm>
-          <a:prstGeom prst="rect">
-            <a:avLst/>
-          </a:prstGeom>
-          <a:noFill/>
-        </p:spPr>
-        <p:txBody>
-          <a:bodyPr wrap="square">
-            <a:spAutoFit/>
-          </a:bodyPr>
-          <a:lstStyle/>
-          <a:p>
-            <a:pPr algn="l"/>
-            <a:r>
-              <a:rPr sz="2600" b="1" i="0">
+            <a:off x="502920" y="146304"/>
+            <a:ext cx="11155680" cy="475488"/>
+          </a:xfrm>
+          <a:prstGeom prst="rect">
+            <a:avLst/>
+          </a:prstGeom>
+          <a:noFill/>
+        </p:spPr>
+        <p:txBody>
+          <a:bodyPr wrap="square">
+            <a:spAutoFit/>
+          </a:bodyPr>
+          <a:lstStyle/>
+          <a:p>
+            <a:pPr algn="l"/>
+            <a:r>
+              <a:rPr sz="2400" b="1" i="0">
                 <a:solidFill>
                   <a:srgbClr val="1A222E"/>
                 </a:solidFill>
               </a:rPr>
-              <a:t>04  工具深入 — Task 任務管理工具</a:t>
-            </a:r>
-          </a:p>
-        </p:txBody>
-      </p:sp>
-      <p:sp>
-        <p:nvSpPr>
-          <p:cNvPr id="4" name="Rectangle 3"/>
+              <a:t>06  工具深入 — Task 任務管理工具</a:t>
+            </a:r>
+          </a:p>
+        </p:txBody>
+      </p:sp>
+      <p:sp>
+        <p:nvSpPr>
+          <p:cNvPr id="4" name="TextBox 3"/>
+          <p:cNvSpPr txBox="1"/>
+          <p:nvPr/>
+        </p:nvSpPr>
+        <p:spPr>
+          <a:xfrm>
+            <a:off x="502920" y="640080"/>
+            <a:ext cx="11155680" cy="274320"/>
+          </a:xfrm>
+          <a:prstGeom prst="rect">
+            <a:avLst/>
+          </a:prstGeom>
+          <a:noFill/>
+        </p:spPr>
+        <p:txBody>
+          <a:bodyPr wrap="square">
+            <a:spAutoFit/>
+          </a:bodyPr>
+          <a:lstStyle/>
+          <a:p>
+            <a:pPr algn="l"/>
+            <a:r>
+              <a:rPr sz="1300" b="0" i="1">
+                <a:solidFill>
+                  <a:srgbClr val="55657A"/>
+                </a:solidFill>
+              </a:rPr>
+              <a:t>追蹤 Bash run_in_background 產生的背景任務</a:t>
+            </a:r>
+          </a:p>
+        </p:txBody>
+      </p:sp>
+      <p:sp>
+        <p:nvSpPr>
+          <p:cNvPr id="5" name="Rectangle 4"/>
           <p:cNvSpPr/>
           <p:nvPr/>
         </p:nvSpPr>
         <p:spPr>
           <a:xfrm>
-            <a:off x="457200" y="914400"/>
+            <a:off x="457200" y="950976"/>
             <a:ext cx="11274552" cy="41148"/>
           </a:xfrm>
           <a:prstGeom prst="rect">
@@ -16377,40 +16412,6 @@
       </p:sp>
       <p:sp>
         <p:nvSpPr>
-          <p:cNvPr id="5" name="TextBox 4"/>
-          <p:cNvSpPr txBox="1"/>
-          <p:nvPr/>
-        </p:nvSpPr>
-        <p:spPr>
-          <a:xfrm>
-            <a:off x="502920" y="987552"/>
-            <a:ext cx="10972800" cy="384048"/>
-          </a:xfrm>
-          <a:prstGeom prst="rect">
-            <a:avLst/>
-          </a:prstGeom>
-          <a:noFill/>
-        </p:spPr>
-        <p:txBody>
-          <a:bodyPr wrap="square">
-            <a:spAutoFit/>
-          </a:bodyPr>
-          <a:lstStyle/>
-          <a:p>
-            <a:pPr algn="l"/>
-            <a:r>
-              <a:rPr sz="1400" b="0" i="1">
-                <a:solidFill>
-                  <a:srgbClr val="55657A"/>
-                </a:solidFill>
-              </a:rPr>
-              <a:t>追蹤 Bash run_in_background 產生的背景任務；★ = auto-allow</a:t>
-            </a:r>
-          </a:p>
-        </p:txBody>
-      </p:sp>
-      <p:sp>
-        <p:nvSpPr>
           <p:cNvPr id="6" name="TextBox 5"/>
           <p:cNvSpPr txBox="1"/>
           <p:nvPr/>
@@ -16495,7 +16496,7 @@
         <p:spPr>
           <a:xfrm>
             <a:off x="548640" y="1472184"/>
-            <a:ext cx="1920240" cy="237744"/>
+            <a:ext cx="2212848" cy="237744"/>
           </a:xfrm>
           <a:prstGeom prst="rect">
             <a:avLst/>
@@ -16528,8 +16529,8 @@
         </p:nvSpPr>
         <p:spPr>
           <a:xfrm>
-            <a:off x="2496312" y="1472184"/>
-            <a:ext cx="384048" cy="237744"/>
+            <a:off x="2788920" y="1472184"/>
+            <a:ext cx="8979408" cy="237744"/>
           </a:xfrm>
           <a:prstGeom prst="rect">
             <a:avLst/>
@@ -16546,40 +16547,6 @@
             <a:r>
               <a:rPr sz="1300" b="1" i="0">
                 <a:solidFill>
-                  <a:srgbClr val="1D6FC8"/>
-                </a:solidFill>
-              </a:rPr>
-              <a:t>★</a:t>
-            </a:r>
-          </a:p>
-        </p:txBody>
-      </p:sp>
-      <p:sp>
-        <p:nvSpPr>
-          <p:cNvPr id="10" name="TextBox 9"/>
-          <p:cNvSpPr txBox="1"/>
-          <p:nvPr/>
-        </p:nvSpPr>
-        <p:spPr>
-          <a:xfrm>
-            <a:off x="2953512" y="1472184"/>
-            <a:ext cx="8851392" cy="237744"/>
-          </a:xfrm>
-          <a:prstGeom prst="rect">
-            <a:avLst/>
-          </a:prstGeom>
-          <a:noFill/>
-        </p:spPr>
-        <p:txBody>
-          <a:bodyPr wrap="square">
-            <a:spAutoFit/>
-          </a:bodyPr>
-          <a:lstStyle/>
-          <a:p>
-            <a:pPr algn="l"/>
-            <a:r>
-              <a:rPr sz="1300" b="1" i="0">
-                <a:solidFill>
                   <a:srgbClr val="55657A"/>
                 </a:solidFill>
               </a:rPr>
@@ -16590,7 +16557,7 @@
       </p:sp>
       <p:sp>
         <p:nvSpPr>
-          <p:cNvPr id="11" name="Rectangle 10"/>
+          <p:cNvPr id="10" name="Rectangle 9"/>
           <p:cNvSpPr/>
           <p:nvPr/>
         </p:nvSpPr>
@@ -16633,82 +16600,48 @@
       </p:sp>
       <p:sp>
         <p:nvSpPr>
+          <p:cNvPr id="11" name="TextBox 10"/>
+          <p:cNvSpPr txBox="1"/>
+          <p:nvPr/>
+        </p:nvSpPr>
+        <p:spPr>
+          <a:xfrm>
+            <a:off x="548640" y="1828800"/>
+            <a:ext cx="2212848" cy="219456"/>
+          </a:xfrm>
+          <a:prstGeom prst="rect">
+            <a:avLst/>
+          </a:prstGeom>
+          <a:noFill/>
+        </p:spPr>
+        <p:txBody>
+          <a:bodyPr wrap="square">
+            <a:spAutoFit/>
+          </a:bodyPr>
+          <a:lstStyle/>
+          <a:p>
+            <a:pPr algn="l"/>
+            <a:r>
+              <a:rPr sz="1300" b="1" i="0">
+                <a:solidFill>
+                  <a:srgbClr val="0E7A8E"/>
+                </a:solidFill>
+              </a:rPr>
+              <a:t>TaskCreate</a:t>
+            </a:r>
+          </a:p>
+        </p:txBody>
+      </p:sp>
+      <p:sp>
+        <p:nvSpPr>
           <p:cNvPr id="12" name="TextBox 11"/>
           <p:cNvSpPr txBox="1"/>
           <p:nvPr/>
         </p:nvSpPr>
         <p:spPr>
           <a:xfrm>
-            <a:off x="548640" y="1828800"/>
-            <a:ext cx="1920240" cy="292608"/>
-          </a:xfrm>
-          <a:prstGeom prst="rect">
-            <a:avLst/>
-          </a:prstGeom>
-          <a:noFill/>
-        </p:spPr>
-        <p:txBody>
-          <a:bodyPr wrap="square">
-            <a:spAutoFit/>
-          </a:bodyPr>
-          <a:lstStyle/>
-          <a:p>
-            <a:pPr algn="l"/>
-            <a:r>
-              <a:rPr sz="1300" b="1" i="0">
-                <a:solidFill>
-                  <a:srgbClr val="0E7A8E"/>
-                </a:solidFill>
-              </a:rPr>
-              <a:t>TaskCreate</a:t>
-            </a:r>
-          </a:p>
-        </p:txBody>
-      </p:sp>
-      <p:sp>
-        <p:nvSpPr>
-          <p:cNvPr id="13" name="TextBox 12"/>
-          <p:cNvSpPr txBox="1"/>
-          <p:nvPr/>
-        </p:nvSpPr>
-        <p:spPr>
-          <a:xfrm>
-            <a:off x="2496312" y="1828800"/>
-            <a:ext cx="384048" cy="292608"/>
-          </a:xfrm>
-          <a:prstGeom prst="rect">
-            <a:avLst/>
-          </a:prstGeom>
-          <a:noFill/>
-        </p:spPr>
-        <p:txBody>
-          <a:bodyPr wrap="square">
-            <a:spAutoFit/>
-          </a:bodyPr>
-          <a:lstStyle/>
-          <a:p>
-            <a:pPr algn="l"/>
-            <a:r>
-              <a:rPr sz="1300" b="1" i="0">
-                <a:solidFill>
-                  <a:srgbClr val="1D6FC8"/>
-                </a:solidFill>
-              </a:rPr>
-              <a:t> </a:t>
-            </a:r>
-          </a:p>
-        </p:txBody>
-      </p:sp>
-      <p:sp>
-        <p:nvSpPr>
-          <p:cNvPr id="14" name="TextBox 13"/>
-          <p:cNvSpPr txBox="1"/>
-          <p:nvPr/>
-        </p:nvSpPr>
-        <p:spPr>
-          <a:xfrm>
-            <a:off x="2953512" y="1828800"/>
-            <a:ext cx="8851392" cy="292608"/>
+            <a:off x="2788920" y="1828800"/>
+            <a:ext cx="8979408" cy="219456"/>
           </a:xfrm>
           <a:prstGeom prst="rect">
             <a:avLst/>
@@ -16735,13 +16668,13 @@
       </p:sp>
       <p:sp>
         <p:nvSpPr>
-          <p:cNvPr id="15" name="Rectangle 14"/>
+          <p:cNvPr id="13" name="Rectangle 12"/>
           <p:cNvSpPr/>
           <p:nvPr/>
         </p:nvSpPr>
         <p:spPr>
           <a:xfrm>
-            <a:off x="457200" y="2121408"/>
+            <a:off x="457200" y="2048255"/>
             <a:ext cx="11274552" cy="41148"/>
           </a:xfrm>
           <a:prstGeom prst="rect">
@@ -16778,14 +16711,14 @@
       </p:sp>
       <p:sp>
         <p:nvSpPr>
-          <p:cNvPr id="16" name="TextBox 15"/>
-          <p:cNvSpPr txBox="1"/>
-          <p:nvPr/>
-        </p:nvSpPr>
-        <p:spPr>
-          <a:xfrm>
-            <a:off x="548640" y="2176272"/>
-            <a:ext cx="1920240" cy="292608"/>
+          <p:cNvPr id="14" name="TextBox 13"/>
+          <p:cNvSpPr txBox="1"/>
+          <p:nvPr/>
+        </p:nvSpPr>
+        <p:spPr>
+          <a:xfrm>
+            <a:off x="548640" y="2103120"/>
+            <a:ext cx="2212848" cy="219456"/>
           </a:xfrm>
           <a:prstGeom prst="rect">
             <a:avLst/>
@@ -16812,48 +16745,14 @@
       </p:sp>
       <p:sp>
         <p:nvSpPr>
-          <p:cNvPr id="17" name="TextBox 16"/>
-          <p:cNvSpPr txBox="1"/>
-          <p:nvPr/>
-        </p:nvSpPr>
-        <p:spPr>
-          <a:xfrm>
-            <a:off x="2496312" y="2176272"/>
-            <a:ext cx="384048" cy="292608"/>
-          </a:xfrm>
-          <a:prstGeom prst="rect">
-            <a:avLst/>
-          </a:prstGeom>
-          <a:noFill/>
-        </p:spPr>
-        <p:txBody>
-          <a:bodyPr wrap="square">
-            <a:spAutoFit/>
-          </a:bodyPr>
-          <a:lstStyle/>
-          <a:p>
-            <a:pPr algn="l"/>
-            <a:r>
-              <a:rPr sz="1300" b="1" i="0">
-                <a:solidFill>
-                  <a:srgbClr val="1D6FC8"/>
-                </a:solidFill>
-              </a:rPr>
-              <a:t> </a:t>
-            </a:r>
-          </a:p>
-        </p:txBody>
-      </p:sp>
-      <p:sp>
-        <p:nvSpPr>
-          <p:cNvPr id="18" name="TextBox 17"/>
-          <p:cNvSpPr txBox="1"/>
-          <p:nvPr/>
-        </p:nvSpPr>
-        <p:spPr>
-          <a:xfrm>
-            <a:off x="2953512" y="2176272"/>
-            <a:ext cx="8851392" cy="292608"/>
+          <p:cNvPr id="15" name="TextBox 14"/>
+          <p:cNvSpPr txBox="1"/>
+          <p:nvPr/>
+        </p:nvSpPr>
+        <p:spPr>
+          <a:xfrm>
+            <a:off x="2788920" y="2103120"/>
+            <a:ext cx="8979408" cy="219456"/>
           </a:xfrm>
           <a:prstGeom prst="rect">
             <a:avLst/>
@@ -16880,13 +16779,13 @@
       </p:sp>
       <p:sp>
         <p:nvSpPr>
-          <p:cNvPr id="19" name="Rectangle 18"/>
+          <p:cNvPr id="16" name="Rectangle 15"/>
           <p:cNvSpPr/>
           <p:nvPr/>
         </p:nvSpPr>
         <p:spPr>
           <a:xfrm>
-            <a:off x="457200" y="2468879"/>
+            <a:off x="457200" y="2322575"/>
             <a:ext cx="11274552" cy="41148"/>
           </a:xfrm>
           <a:prstGeom prst="rect">
@@ -16923,14 +16822,14 @@
       </p:sp>
       <p:sp>
         <p:nvSpPr>
-          <p:cNvPr id="20" name="TextBox 19"/>
-          <p:cNvSpPr txBox="1"/>
-          <p:nvPr/>
-        </p:nvSpPr>
-        <p:spPr>
-          <a:xfrm>
-            <a:off x="548640" y="2523744"/>
-            <a:ext cx="1920240" cy="292608"/>
+          <p:cNvPr id="17" name="TextBox 16"/>
+          <p:cNvSpPr txBox="1"/>
+          <p:nvPr/>
+        </p:nvSpPr>
+        <p:spPr>
+          <a:xfrm>
+            <a:off x="548640" y="2377439"/>
+            <a:ext cx="2212848" cy="219456"/>
           </a:xfrm>
           <a:prstGeom prst="rect">
             <a:avLst/>
@@ -16957,48 +16856,14 @@
       </p:sp>
       <p:sp>
         <p:nvSpPr>
-          <p:cNvPr id="21" name="TextBox 20"/>
-          <p:cNvSpPr txBox="1"/>
-          <p:nvPr/>
-        </p:nvSpPr>
-        <p:spPr>
-          <a:xfrm>
-            <a:off x="2496312" y="2523744"/>
-            <a:ext cx="384048" cy="292608"/>
-          </a:xfrm>
-          <a:prstGeom prst="rect">
-            <a:avLst/>
-          </a:prstGeom>
-          <a:noFill/>
-        </p:spPr>
-        <p:txBody>
-          <a:bodyPr wrap="square">
-            <a:spAutoFit/>
-          </a:bodyPr>
-          <a:lstStyle/>
-          <a:p>
-            <a:pPr algn="l"/>
-            <a:r>
-              <a:rPr sz="1300" b="1" i="0">
-                <a:solidFill>
-                  <a:srgbClr val="1D6FC8"/>
-                </a:solidFill>
-              </a:rPr>
-              <a:t> </a:t>
-            </a:r>
-          </a:p>
-        </p:txBody>
-      </p:sp>
-      <p:sp>
-        <p:nvSpPr>
-          <p:cNvPr id="22" name="TextBox 21"/>
-          <p:cNvSpPr txBox="1"/>
-          <p:nvPr/>
-        </p:nvSpPr>
-        <p:spPr>
-          <a:xfrm>
-            <a:off x="2953512" y="2523744"/>
-            <a:ext cx="8851392" cy="292608"/>
+          <p:cNvPr id="18" name="TextBox 17"/>
+          <p:cNvSpPr txBox="1"/>
+          <p:nvPr/>
+        </p:nvSpPr>
+        <p:spPr>
+          <a:xfrm>
+            <a:off x="2788920" y="2377439"/>
+            <a:ext cx="8979408" cy="219456"/>
           </a:xfrm>
           <a:prstGeom prst="rect">
             <a:avLst/>
@@ -17025,13 +16890,13 @@
       </p:sp>
       <p:sp>
         <p:nvSpPr>
-          <p:cNvPr id="23" name="Rectangle 22"/>
+          <p:cNvPr id="19" name="Rectangle 18"/>
           <p:cNvSpPr/>
           <p:nvPr/>
         </p:nvSpPr>
         <p:spPr>
           <a:xfrm>
-            <a:off x="457200" y="2816351"/>
+            <a:off x="457200" y="2596895"/>
             <a:ext cx="11274552" cy="41148"/>
           </a:xfrm>
           <a:prstGeom prst="rect">
@@ -17068,14 +16933,14 @@
       </p:sp>
       <p:sp>
         <p:nvSpPr>
-          <p:cNvPr id="24" name="TextBox 23"/>
-          <p:cNvSpPr txBox="1"/>
-          <p:nvPr/>
-        </p:nvSpPr>
-        <p:spPr>
-          <a:xfrm>
-            <a:off x="548640" y="2871215"/>
-            <a:ext cx="1920240" cy="292608"/>
+          <p:cNvPr id="20" name="TextBox 19"/>
+          <p:cNvSpPr txBox="1"/>
+          <p:nvPr/>
+        </p:nvSpPr>
+        <p:spPr>
+          <a:xfrm>
+            <a:off x="548640" y="2651759"/>
+            <a:ext cx="2212848" cy="219456"/>
           </a:xfrm>
           <a:prstGeom prst="rect">
             <a:avLst/>
@@ -17102,48 +16967,14 @@
       </p:sp>
       <p:sp>
         <p:nvSpPr>
-          <p:cNvPr id="25" name="TextBox 24"/>
-          <p:cNvSpPr txBox="1"/>
-          <p:nvPr/>
-        </p:nvSpPr>
-        <p:spPr>
-          <a:xfrm>
-            <a:off x="2496312" y="2871215"/>
-            <a:ext cx="384048" cy="292608"/>
-          </a:xfrm>
-          <a:prstGeom prst="rect">
-            <a:avLst/>
-          </a:prstGeom>
-          <a:noFill/>
-        </p:spPr>
-        <p:txBody>
-          <a:bodyPr wrap="square">
-            <a:spAutoFit/>
-          </a:bodyPr>
-          <a:lstStyle/>
-          <a:p>
-            <a:pPr algn="l"/>
-            <a:r>
-              <a:rPr sz="1300" b="1" i="0">
-                <a:solidFill>
-                  <a:srgbClr val="1D6FC8"/>
-                </a:solidFill>
-              </a:rPr>
-              <a:t>★</a:t>
-            </a:r>
-          </a:p>
-        </p:txBody>
-      </p:sp>
-      <p:sp>
-        <p:nvSpPr>
-          <p:cNvPr id="26" name="TextBox 25"/>
-          <p:cNvSpPr txBox="1"/>
-          <p:nvPr/>
-        </p:nvSpPr>
-        <p:spPr>
-          <a:xfrm>
-            <a:off x="2953512" y="2871215"/>
-            <a:ext cx="8851392" cy="292608"/>
+          <p:cNvPr id="21" name="TextBox 20"/>
+          <p:cNvSpPr txBox="1"/>
+          <p:nvPr/>
+        </p:nvSpPr>
+        <p:spPr>
+          <a:xfrm>
+            <a:off x="2788920" y="2651759"/>
+            <a:ext cx="8979408" cy="219456"/>
           </a:xfrm>
           <a:prstGeom prst="rect">
             <a:avLst/>
@@ -17170,13 +17001,13 @@
       </p:sp>
       <p:sp>
         <p:nvSpPr>
-          <p:cNvPr id="27" name="Rectangle 26"/>
+          <p:cNvPr id="22" name="Rectangle 21"/>
           <p:cNvSpPr/>
           <p:nvPr/>
         </p:nvSpPr>
         <p:spPr>
           <a:xfrm>
-            <a:off x="457200" y="3163823"/>
+            <a:off x="457200" y="2871215"/>
             <a:ext cx="11274552" cy="41148"/>
           </a:xfrm>
           <a:prstGeom prst="rect">
@@ -17213,14 +17044,14 @@
       </p:sp>
       <p:sp>
         <p:nvSpPr>
-          <p:cNvPr id="28" name="TextBox 27"/>
-          <p:cNvSpPr txBox="1"/>
-          <p:nvPr/>
-        </p:nvSpPr>
-        <p:spPr>
-          <a:xfrm>
-            <a:off x="548640" y="3218687"/>
-            <a:ext cx="1920240" cy="292608"/>
+          <p:cNvPr id="23" name="TextBox 22"/>
+          <p:cNvSpPr txBox="1"/>
+          <p:nvPr/>
+        </p:nvSpPr>
+        <p:spPr>
+          <a:xfrm>
+            <a:off x="548640" y="2926079"/>
+            <a:ext cx="2212848" cy="219456"/>
           </a:xfrm>
           <a:prstGeom prst="rect">
             <a:avLst/>
@@ -17247,48 +17078,14 @@
       </p:sp>
       <p:sp>
         <p:nvSpPr>
-          <p:cNvPr id="29" name="TextBox 28"/>
-          <p:cNvSpPr txBox="1"/>
-          <p:nvPr/>
-        </p:nvSpPr>
-        <p:spPr>
-          <a:xfrm>
-            <a:off x="2496312" y="3218687"/>
-            <a:ext cx="384048" cy="292608"/>
-          </a:xfrm>
-          <a:prstGeom prst="rect">
-            <a:avLst/>
-          </a:prstGeom>
-          <a:noFill/>
-        </p:spPr>
-        <p:txBody>
-          <a:bodyPr wrap="square">
-            <a:spAutoFit/>
-          </a:bodyPr>
-          <a:lstStyle/>
-          <a:p>
-            <a:pPr algn="l"/>
-            <a:r>
-              <a:rPr sz="1300" b="1" i="0">
-                <a:solidFill>
-                  <a:srgbClr val="1D6FC8"/>
-                </a:solidFill>
-              </a:rPr>
-              <a:t>★</a:t>
-            </a:r>
-          </a:p>
-        </p:txBody>
-      </p:sp>
-      <p:sp>
-        <p:nvSpPr>
-          <p:cNvPr id="30" name="TextBox 29"/>
-          <p:cNvSpPr txBox="1"/>
-          <p:nvPr/>
-        </p:nvSpPr>
-        <p:spPr>
-          <a:xfrm>
-            <a:off x="2953512" y="3218687"/>
-            <a:ext cx="8851392" cy="292608"/>
+          <p:cNvPr id="24" name="TextBox 23"/>
+          <p:cNvSpPr txBox="1"/>
+          <p:nvPr/>
+        </p:nvSpPr>
+        <p:spPr>
+          <a:xfrm>
+            <a:off x="2788920" y="2926079"/>
+            <a:ext cx="8979408" cy="219456"/>
           </a:xfrm>
           <a:prstGeom prst="rect">
             <a:avLst/>
@@ -17315,13 +17112,13 @@
       </p:sp>
       <p:sp>
         <p:nvSpPr>
-          <p:cNvPr id="31" name="Rectangle 30"/>
+          <p:cNvPr id="25" name="Rectangle 24"/>
           <p:cNvSpPr/>
           <p:nvPr/>
         </p:nvSpPr>
         <p:spPr>
           <a:xfrm>
-            <a:off x="457200" y="3511295"/>
+            <a:off x="457200" y="3145535"/>
             <a:ext cx="11274552" cy="41148"/>
           </a:xfrm>
           <a:prstGeom prst="rect">
@@ -17358,14 +17155,14 @@
       </p:sp>
       <p:sp>
         <p:nvSpPr>
-          <p:cNvPr id="32" name="TextBox 31"/>
-          <p:cNvSpPr txBox="1"/>
-          <p:nvPr/>
-        </p:nvSpPr>
-        <p:spPr>
-          <a:xfrm>
-            <a:off x="548640" y="3566159"/>
-            <a:ext cx="1920240" cy="292608"/>
+          <p:cNvPr id="26" name="TextBox 25"/>
+          <p:cNvSpPr txBox="1"/>
+          <p:nvPr/>
+        </p:nvSpPr>
+        <p:spPr>
+          <a:xfrm>
+            <a:off x="548640" y="3200399"/>
+            <a:ext cx="2212848" cy="219456"/>
           </a:xfrm>
           <a:prstGeom prst="rect">
             <a:avLst/>
@@ -17392,48 +17189,14 @@
       </p:sp>
       <p:sp>
         <p:nvSpPr>
-          <p:cNvPr id="33" name="TextBox 32"/>
-          <p:cNvSpPr txBox="1"/>
-          <p:nvPr/>
-        </p:nvSpPr>
-        <p:spPr>
-          <a:xfrm>
-            <a:off x="2496312" y="3566159"/>
-            <a:ext cx="384048" cy="292608"/>
-          </a:xfrm>
-          <a:prstGeom prst="rect">
-            <a:avLst/>
-          </a:prstGeom>
-          <a:noFill/>
-        </p:spPr>
-        <p:txBody>
-          <a:bodyPr wrap="square">
-            <a:spAutoFit/>
-          </a:bodyPr>
-          <a:lstStyle/>
-          <a:p>
-            <a:pPr algn="l"/>
-            <a:r>
-              <a:rPr sz="1300" b="1" i="0">
-                <a:solidFill>
-                  <a:srgbClr val="1D6FC8"/>
-                </a:solidFill>
-              </a:rPr>
-              <a:t>★</a:t>
-            </a:r>
-          </a:p>
-        </p:txBody>
-      </p:sp>
-      <p:sp>
-        <p:nvSpPr>
-          <p:cNvPr id="34" name="TextBox 33"/>
-          <p:cNvSpPr txBox="1"/>
-          <p:nvPr/>
-        </p:nvSpPr>
-        <p:spPr>
-          <a:xfrm>
-            <a:off x="2953512" y="3566159"/>
-            <a:ext cx="8851392" cy="292608"/>
+          <p:cNvPr id="27" name="TextBox 26"/>
+          <p:cNvSpPr txBox="1"/>
+          <p:nvPr/>
+        </p:nvSpPr>
+        <p:spPr>
+          <a:xfrm>
+            <a:off x="2788920" y="3200399"/>
+            <a:ext cx="8979408" cy="219456"/>
           </a:xfrm>
           <a:prstGeom prst="rect">
             <a:avLst/>
@@ -17460,13 +17223,13 @@
       </p:sp>
       <p:sp>
         <p:nvSpPr>
-          <p:cNvPr id="35" name="Rectangle 34"/>
+          <p:cNvPr id="28" name="Rectangle 27"/>
           <p:cNvSpPr/>
           <p:nvPr/>
         </p:nvSpPr>
         <p:spPr>
           <a:xfrm>
-            <a:off x="457200" y="3858768"/>
+            <a:off x="457200" y="3419855"/>
             <a:ext cx="11274552" cy="41148"/>
           </a:xfrm>
           <a:prstGeom prst="rect">
@@ -17503,14 +17266,14 @@
       </p:sp>
       <p:sp>
         <p:nvSpPr>
-          <p:cNvPr id="36" name="TextBox 35"/>
-          <p:cNvSpPr txBox="1"/>
-          <p:nvPr/>
-        </p:nvSpPr>
-        <p:spPr>
-          <a:xfrm>
-            <a:off x="548640" y="3913631"/>
-            <a:ext cx="1920240" cy="292608"/>
+          <p:cNvPr id="29" name="TextBox 28"/>
+          <p:cNvSpPr txBox="1"/>
+          <p:nvPr/>
+        </p:nvSpPr>
+        <p:spPr>
+          <a:xfrm>
+            <a:off x="548640" y="3474719"/>
+            <a:ext cx="2212848" cy="219456"/>
           </a:xfrm>
           <a:prstGeom prst="rect">
             <a:avLst/>
@@ -17537,48 +17300,14 @@
       </p:sp>
       <p:sp>
         <p:nvSpPr>
-          <p:cNvPr id="37" name="TextBox 36"/>
-          <p:cNvSpPr txBox="1"/>
-          <p:nvPr/>
-        </p:nvSpPr>
-        <p:spPr>
-          <a:xfrm>
-            <a:off x="2496312" y="3913631"/>
-            <a:ext cx="384048" cy="292608"/>
-          </a:xfrm>
-          <a:prstGeom prst="rect">
-            <a:avLst/>
-          </a:prstGeom>
-          <a:noFill/>
-        </p:spPr>
-        <p:txBody>
-          <a:bodyPr wrap="square">
-            <a:spAutoFit/>
-          </a:bodyPr>
-          <a:lstStyle/>
-          <a:p>
-            <a:pPr algn="l"/>
-            <a:r>
-              <a:rPr sz="1300" b="1" i="0">
-                <a:solidFill>
-                  <a:srgbClr val="1D6FC8"/>
-                </a:solidFill>
-              </a:rPr>
-              <a:t> </a:t>
-            </a:r>
-          </a:p>
-        </p:txBody>
-      </p:sp>
-      <p:sp>
-        <p:nvSpPr>
-          <p:cNvPr id="38" name="TextBox 37"/>
-          <p:cNvSpPr txBox="1"/>
-          <p:nvPr/>
-        </p:nvSpPr>
-        <p:spPr>
-          <a:xfrm>
-            <a:off x="2953512" y="3913631"/>
-            <a:ext cx="8851392" cy="292608"/>
+          <p:cNvPr id="30" name="TextBox 29"/>
+          <p:cNvSpPr txBox="1"/>
+          <p:nvPr/>
+        </p:nvSpPr>
+        <p:spPr>
+          <a:xfrm>
+            <a:off x="2788920" y="3474719"/>
+            <a:ext cx="8979408" cy="219456"/>
           </a:xfrm>
           <a:prstGeom prst="rect">
             <a:avLst/>
@@ -17605,13 +17334,13 @@
       </p:sp>
       <p:sp>
         <p:nvSpPr>
-          <p:cNvPr id="39" name="Rectangle 38"/>
+          <p:cNvPr id="31" name="Rectangle 30"/>
           <p:cNvSpPr/>
           <p:nvPr/>
         </p:nvSpPr>
         <p:spPr>
           <a:xfrm>
-            <a:off x="457200" y="4206240"/>
+            <a:off x="457200" y="3694175"/>
             <a:ext cx="11274552" cy="41148"/>
           </a:xfrm>
           <a:prstGeom prst="rect">
@@ -17648,14 +17377,14 @@
       </p:sp>
       <p:sp>
         <p:nvSpPr>
-          <p:cNvPr id="40" name="TextBox 39"/>
-          <p:cNvSpPr txBox="1"/>
-          <p:nvPr/>
-        </p:nvSpPr>
-        <p:spPr>
-          <a:xfrm>
-            <a:off x="548640" y="4261103"/>
-            <a:ext cx="1920240" cy="292608"/>
+          <p:cNvPr id="32" name="TextBox 31"/>
+          <p:cNvSpPr txBox="1"/>
+          <p:nvPr/>
+        </p:nvSpPr>
+        <p:spPr>
+          <a:xfrm>
+            <a:off x="548640" y="3749039"/>
+            <a:ext cx="2212848" cy="219456"/>
           </a:xfrm>
           <a:prstGeom prst="rect">
             <a:avLst/>
@@ -17682,48 +17411,14 @@
       </p:sp>
       <p:sp>
         <p:nvSpPr>
-          <p:cNvPr id="41" name="TextBox 40"/>
-          <p:cNvSpPr txBox="1"/>
-          <p:nvPr/>
-        </p:nvSpPr>
-        <p:spPr>
-          <a:xfrm>
-            <a:off x="2496312" y="4261103"/>
-            <a:ext cx="384048" cy="292608"/>
-          </a:xfrm>
-          <a:prstGeom prst="rect">
-            <a:avLst/>
-          </a:prstGeom>
-          <a:noFill/>
-        </p:spPr>
-        <p:txBody>
-          <a:bodyPr wrap="square">
-            <a:spAutoFit/>
-          </a:bodyPr>
-          <a:lstStyle/>
-          <a:p>
-            <a:pPr algn="l"/>
-            <a:r>
-              <a:rPr sz="1300" b="1" i="0">
-                <a:solidFill>
-                  <a:srgbClr val="1D6FC8"/>
-                </a:solidFill>
-              </a:rPr>
-              <a:t> </a:t>
-            </a:r>
-          </a:p>
-        </p:txBody>
-      </p:sp>
-      <p:sp>
-        <p:nvSpPr>
-          <p:cNvPr id="42" name="TextBox 41"/>
-          <p:cNvSpPr txBox="1"/>
-          <p:nvPr/>
-        </p:nvSpPr>
-        <p:spPr>
-          <a:xfrm>
-            <a:off x="2953512" y="4261103"/>
-            <a:ext cx="8851392" cy="292608"/>
+          <p:cNvPr id="33" name="TextBox 32"/>
+          <p:cNvSpPr txBox="1"/>
+          <p:nvPr/>
+        </p:nvSpPr>
+        <p:spPr>
+          <a:xfrm>
+            <a:off x="2788920" y="3749039"/>
+            <a:ext cx="8979408" cy="219456"/>
           </a:xfrm>
           <a:prstGeom prst="rect">
             <a:avLst/>
@@ -17750,13 +17445,13 @@
       </p:sp>
       <p:sp>
         <p:nvSpPr>
-          <p:cNvPr id="43" name="Rectangle 42"/>
+          <p:cNvPr id="34" name="Rectangle 33"/>
           <p:cNvSpPr/>
           <p:nvPr/>
         </p:nvSpPr>
         <p:spPr>
           <a:xfrm>
-            <a:off x="457200" y="4553712"/>
+            <a:off x="457200" y="3968495"/>
             <a:ext cx="11274552" cy="41148"/>
           </a:xfrm>
           <a:prstGeom prst="rect">
@@ -17793,14 +17488,14 @@
       </p:sp>
       <p:sp>
         <p:nvSpPr>
-          <p:cNvPr id="44" name="TextBox 43"/>
-          <p:cNvSpPr txBox="1"/>
-          <p:nvPr/>
-        </p:nvSpPr>
-        <p:spPr>
-          <a:xfrm>
-            <a:off x="548640" y="4608575"/>
-            <a:ext cx="1920240" cy="292608"/>
+          <p:cNvPr id="35" name="TextBox 34"/>
+          <p:cNvSpPr txBox="1"/>
+          <p:nvPr/>
+        </p:nvSpPr>
+        <p:spPr>
+          <a:xfrm>
+            <a:off x="548640" y="4023359"/>
+            <a:ext cx="2212848" cy="219456"/>
           </a:xfrm>
           <a:prstGeom prst="rect">
             <a:avLst/>
@@ -17827,48 +17522,14 @@
       </p:sp>
       <p:sp>
         <p:nvSpPr>
-          <p:cNvPr id="45" name="TextBox 44"/>
-          <p:cNvSpPr txBox="1"/>
-          <p:nvPr/>
-        </p:nvSpPr>
-        <p:spPr>
-          <a:xfrm>
-            <a:off x="2496312" y="4608575"/>
-            <a:ext cx="384048" cy="292608"/>
-          </a:xfrm>
-          <a:prstGeom prst="rect">
-            <a:avLst/>
-          </a:prstGeom>
-          <a:noFill/>
-        </p:spPr>
-        <p:txBody>
-          <a:bodyPr wrap="square">
-            <a:spAutoFit/>
-          </a:bodyPr>
-          <a:lstStyle/>
-          <a:p>
-            <a:pPr algn="l"/>
-            <a:r>
-              <a:rPr sz="1300" b="1" i="0">
-                <a:solidFill>
-                  <a:srgbClr val="1D6FC8"/>
-                </a:solidFill>
-              </a:rPr>
-              <a:t>★</a:t>
-            </a:r>
-          </a:p>
-        </p:txBody>
-      </p:sp>
-      <p:sp>
-        <p:nvSpPr>
-          <p:cNvPr id="46" name="TextBox 45"/>
-          <p:cNvSpPr txBox="1"/>
-          <p:nvPr/>
-        </p:nvSpPr>
-        <p:spPr>
-          <a:xfrm>
-            <a:off x="2953512" y="4608575"/>
-            <a:ext cx="8851392" cy="292608"/>
+          <p:cNvPr id="36" name="TextBox 35"/>
+          <p:cNvSpPr txBox="1"/>
+          <p:nvPr/>
+        </p:nvSpPr>
+        <p:spPr>
+          <a:xfrm>
+            <a:off x="2788920" y="4023359"/>
+            <a:ext cx="8979408" cy="219456"/>
           </a:xfrm>
           <a:prstGeom prst="rect">
             <a:avLst/>
@@ -17895,13 +17556,13 @@
       </p:sp>
       <p:sp>
         <p:nvSpPr>
-          <p:cNvPr id="47" name="Rectangle 46"/>
+          <p:cNvPr id="37" name="Rectangle 36"/>
           <p:cNvSpPr/>
           <p:nvPr/>
         </p:nvSpPr>
         <p:spPr>
           <a:xfrm>
-            <a:off x="457200" y="4901183"/>
+            <a:off x="457200" y="4242815"/>
             <a:ext cx="11274552" cy="41148"/>
           </a:xfrm>
           <a:prstGeom prst="rect">
@@ -17938,13 +17599,13 @@
       </p:sp>
       <p:sp>
         <p:nvSpPr>
-          <p:cNvPr id="48" name="Rectangle 47"/>
+          <p:cNvPr id="38" name="Rectangle 37"/>
           <p:cNvSpPr/>
           <p:nvPr/>
         </p:nvSpPr>
         <p:spPr>
           <a:xfrm>
-            <a:off x="457200" y="5029199"/>
+            <a:off x="457200" y="4334255"/>
             <a:ext cx="11274552" cy="41148"/>
           </a:xfrm>
           <a:prstGeom prst="rect">
@@ -17981,13 +17642,13 @@
       </p:sp>
       <p:sp>
         <p:nvSpPr>
-          <p:cNvPr id="49" name="TextBox 48"/>
-          <p:cNvSpPr txBox="1"/>
-          <p:nvPr/>
-        </p:nvSpPr>
-        <p:spPr>
-          <a:xfrm>
-            <a:off x="457200" y="5138927"/>
+          <p:cNvPr id="39" name="TextBox 38"/>
+          <p:cNvSpPr txBox="1"/>
+          <p:nvPr/>
+        </p:nvSpPr>
+        <p:spPr>
+          <a:xfrm>
+            <a:off x="457200" y="4407407"/>
             <a:ext cx="5486400" cy="301752"/>
           </a:xfrm>
           <a:prstGeom prst="rect">
@@ -18008,21 +17669,55 @@
                   <a:srgbClr val="0E7A8E"/>
                 </a:solidFill>
               </a:rPr>
-              <a:t>使用流程範例：背景跑測試，完成後取結果</a:t>
-            </a:r>
-          </a:p>
-        </p:txBody>
-      </p:sp>
-      <p:sp>
-        <p:nvSpPr>
-          <p:cNvPr id="50" name="Rectangle 49"/>
+              <a:t>何時走 TASK 機制？</a:t>
+            </a:r>
+          </a:p>
+        </p:txBody>
+      </p:sp>
+      <p:sp>
+        <p:nvSpPr>
+          <p:cNvPr id="40" name="TextBox 39"/>
+          <p:cNvSpPr txBox="1"/>
+          <p:nvPr/>
+        </p:nvSpPr>
+        <p:spPr>
+          <a:xfrm>
+            <a:off x="457200" y="4663439"/>
+            <a:ext cx="11155680" cy="237744"/>
+          </a:xfrm>
+          <a:prstGeom prst="rect">
+            <a:avLst/>
+          </a:prstGeom>
+          <a:noFill/>
+        </p:spPr>
+        <p:txBody>
+          <a:bodyPr wrap="square">
+            <a:spAutoFit/>
+          </a:bodyPr>
+          <a:lstStyle/>
+          <a:p>
+            <a:pPr algn="l"/>
+            <a:r>
+              <a:rPr sz="1300" b="1" i="0">
+                <a:solidFill>
+                  <a:srgbClr val="0E7A8E"/>
+                </a:solidFill>
+              </a:rPr>
+              <a:t>判斷條件：命令跑很久  AND  等待期間有其他事可做  →  兩個條件都要成立才值得用</a:t>
+            </a:r>
+          </a:p>
+        </p:txBody>
+      </p:sp>
+      <p:sp>
+        <p:nvSpPr>
+          <p:cNvPr id="41" name="Rectangle 40"/>
           <p:cNvSpPr/>
           <p:nvPr/>
         </p:nvSpPr>
         <p:spPr>
           <a:xfrm>
-            <a:off x="457200" y="5486399"/>
-            <a:ext cx="11155680" cy="987552"/>
+            <a:off x="457200" y="4846319"/>
+            <a:ext cx="11155680" cy="548640"/>
           </a:xfrm>
           <a:prstGeom prst="rect">
             <a:avLst/>
@@ -18058,69 +17753,420 @@
       </p:sp>
       <p:sp>
         <p:nvSpPr>
-          <p:cNvPr id="51" name="TextBox 50"/>
-          <p:cNvSpPr txBox="1"/>
-          <p:nvPr/>
-        </p:nvSpPr>
-        <p:spPr>
-          <a:xfrm>
-            <a:off x="621792" y="5577840"/>
-            <a:ext cx="10789920" cy="256032"/>
-          </a:xfrm>
-          <a:prstGeom prst="rect">
-            <a:avLst/>
-          </a:prstGeom>
-          <a:noFill/>
-        </p:spPr>
-        <p:txBody>
-          <a:bodyPr wrap="square">
-            <a:spAutoFit/>
-          </a:bodyPr>
-          <a:lstStyle/>
-          <a:p>
-            <a:pPr algn="l"/>
-            <a:r>
-              <a:rPr sz="1300" b="0" i="0">
+          <p:cNvPr id="42" name="Rectangle 41"/>
+          <p:cNvSpPr/>
+          <p:nvPr/>
+        </p:nvSpPr>
+        <p:spPr>
+          <a:xfrm>
+            <a:off x="457200" y="4846319"/>
+            <a:ext cx="164592" cy="548640"/>
+          </a:xfrm>
+          <a:prstGeom prst="rect">
+            <a:avLst/>
+          </a:prstGeom>
+          <a:solidFill>
+            <a:srgbClr val="0E7A8E"/>
+          </a:solidFill>
+          <a:ln>
+            <a:noFill/>
+          </a:ln>
+        </p:spPr>
+        <p:style>
+          <a:lnRef idx="1">
+            <a:schemeClr val="accent1"/>
+          </a:lnRef>
+          <a:fillRef idx="3">
+            <a:schemeClr val="accent1"/>
+          </a:fillRef>
+          <a:effectRef idx="2">
+            <a:schemeClr val="accent1"/>
+          </a:effectRef>
+          <a:fontRef idx="minor">
+            <a:schemeClr val="lt1"/>
+          </a:fontRef>
+        </p:style>
+        <p:txBody>
+          <a:bodyPr rtlCol="0" anchor="ctr"/>
+          <a:lstStyle/>
+          <a:p>
+            <a:pPr algn="ctr"/>
+          </a:p>
+        </p:txBody>
+      </p:sp>
+      <p:sp>
+        <p:nvSpPr>
+          <p:cNvPr id="43" name="TextBox 42"/>
+          <p:cNvSpPr txBox="1"/>
+          <p:nvPr/>
+        </p:nvSpPr>
+        <p:spPr>
+          <a:xfrm>
+            <a:off x="731520" y="4892039"/>
+            <a:ext cx="3474720" cy="219456"/>
+          </a:xfrm>
+          <a:prstGeom prst="rect">
+            <a:avLst/>
+          </a:prstGeom>
+          <a:noFill/>
+        </p:spPr>
+        <p:txBody>
+          <a:bodyPr wrap="square">
+            <a:spAutoFit/>
+          </a:bodyPr>
+          <a:lstStyle/>
+          <a:p>
+            <a:pPr algn="l"/>
+            <a:r>
+              <a:rPr sz="1200" b="1" i="0">
+                <a:solidFill>
+                  <a:srgbClr val="0E7A8E"/>
+                </a:solidFill>
+              </a:rPr>
+              <a:t>走 Task（run_in_background=True）</a:t>
+            </a:r>
+          </a:p>
+        </p:txBody>
+      </p:sp>
+      <p:sp>
+        <p:nvSpPr>
+          <p:cNvPr id="44" name="TextBox 43"/>
+          <p:cNvSpPr txBox="1"/>
+          <p:nvPr/>
+        </p:nvSpPr>
+        <p:spPr>
+          <a:xfrm>
+            <a:off x="4297680" y="4892039"/>
+            <a:ext cx="7132320" cy="219456"/>
+          </a:xfrm>
+          <a:prstGeom prst="rect">
+            <a:avLst/>
+          </a:prstGeom>
+          <a:noFill/>
+        </p:spPr>
+        <p:txBody>
+          <a:bodyPr wrap="square">
+            <a:spAutoFit/>
+          </a:bodyPr>
+          <a:lstStyle/>
+          <a:p>
+            <a:pPr algn="l"/>
+            <a:r>
+              <a:rPr sz="1200" b="0" i="0">
                 <a:solidFill>
                   <a:srgbClr val="1A222E"/>
                 </a:solidFill>
               </a:rPr>
-              <a:t>❶  Bash("npm test --all", run_in_background=True)  →  立即返回 task_id，Claude 不等待，繼續推理其他工作</a:t>
-            </a:r>
-          </a:p>
-        </p:txBody>
-      </p:sp>
-      <p:sp>
-        <p:nvSpPr>
-          <p:cNvPr id="52" name="TextBox 51"/>
-          <p:cNvSpPr txBox="1"/>
-          <p:nvPr/>
-        </p:nvSpPr>
-        <p:spPr>
-          <a:xfrm>
-            <a:off x="621792" y="5852159"/>
-            <a:ext cx="10789920" cy="256032"/>
-          </a:xfrm>
-          <a:prstGeom prst="rect">
-            <a:avLst/>
-          </a:prstGeom>
-          <a:noFill/>
-        </p:spPr>
-        <p:txBody>
-          <a:bodyPr wrap="square">
-            <a:spAutoFit/>
-          </a:bodyPr>
-          <a:lstStyle/>
-          <a:p>
-            <a:pPr algn="l"/>
-            <a:r>
-              <a:rPr sz="1300" b="0" i="0">
+              <a:t>長時間命令 + 等待期間有其他工作</a:t>
+            </a:r>
+          </a:p>
+        </p:txBody>
+      </p:sp>
+      <p:sp>
+        <p:nvSpPr>
+          <p:cNvPr id="45" name="TextBox 44"/>
+          <p:cNvSpPr txBox="1"/>
+          <p:nvPr/>
+        </p:nvSpPr>
+        <p:spPr>
+          <a:xfrm>
+            <a:off x="731520" y="5138927"/>
+            <a:ext cx="10789920" cy="219456"/>
+          </a:xfrm>
+          <a:prstGeom prst="rect">
+            <a:avLst/>
+          </a:prstGeom>
+          <a:noFill/>
+        </p:spPr>
+        <p:txBody>
+          <a:bodyPr wrap="square">
+            <a:spAutoFit/>
+          </a:bodyPr>
+          <a:lstStyle/>
+          <a:p>
+            <a:pPr algn="l"/>
+            <a:r>
+              <a:rPr sz="1100" b="0" i="1">
+                <a:solidFill>
+                  <a:srgbClr val="55657A"/>
+                </a:solidFill>
+              </a:rPr>
+              <a:t>npm test 跑 3 分鐘 → 同時 Explore subagent 分析其他模組；前後端測試同時平行跑</a:t>
+            </a:r>
+          </a:p>
+        </p:txBody>
+      </p:sp>
+      <p:sp>
+        <p:nvSpPr>
+          <p:cNvPr id="46" name="Rectangle 45"/>
+          <p:cNvSpPr/>
+          <p:nvPr/>
+        </p:nvSpPr>
+        <p:spPr>
+          <a:xfrm>
+            <a:off x="457200" y="5431535"/>
+            <a:ext cx="11155680" cy="548640"/>
+          </a:xfrm>
+          <a:prstGeom prst="rect">
+            <a:avLst/>
+          </a:prstGeom>
+          <a:solidFill>
+            <a:srgbClr val="F8FAFC"/>
+          </a:solidFill>
+          <a:ln>
+            <a:noFill/>
+          </a:ln>
+        </p:spPr>
+        <p:style>
+          <a:lnRef idx="1">
+            <a:schemeClr val="accent1"/>
+          </a:lnRef>
+          <a:fillRef idx="3">
+            <a:schemeClr val="accent1"/>
+          </a:fillRef>
+          <a:effectRef idx="2">
+            <a:schemeClr val="accent1"/>
+          </a:effectRef>
+          <a:fontRef idx="minor">
+            <a:schemeClr val="lt1"/>
+          </a:fontRef>
+        </p:style>
+        <p:txBody>
+          <a:bodyPr rtlCol="0" anchor="ctr"/>
+          <a:lstStyle/>
+          <a:p>
+            <a:pPr algn="ctr"/>
+          </a:p>
+        </p:txBody>
+      </p:sp>
+      <p:sp>
+        <p:nvSpPr>
+          <p:cNvPr id="47" name="Rectangle 46"/>
+          <p:cNvSpPr/>
+          <p:nvPr/>
+        </p:nvSpPr>
+        <p:spPr>
+          <a:xfrm>
+            <a:off x="457200" y="5431535"/>
+            <a:ext cx="164592" cy="548640"/>
+          </a:xfrm>
+          <a:prstGeom prst="rect">
+            <a:avLst/>
+          </a:prstGeom>
+          <a:solidFill>
+            <a:srgbClr val="B45A00"/>
+          </a:solidFill>
+          <a:ln>
+            <a:noFill/>
+          </a:ln>
+        </p:spPr>
+        <p:style>
+          <a:lnRef idx="1">
+            <a:schemeClr val="accent1"/>
+          </a:lnRef>
+          <a:fillRef idx="3">
+            <a:schemeClr val="accent1"/>
+          </a:fillRef>
+          <a:effectRef idx="2">
+            <a:schemeClr val="accent1"/>
+          </a:effectRef>
+          <a:fontRef idx="minor">
+            <a:schemeClr val="lt1"/>
+          </a:fontRef>
+        </p:style>
+        <p:txBody>
+          <a:bodyPr rtlCol="0" anchor="ctr"/>
+          <a:lstStyle/>
+          <a:p>
+            <a:pPr algn="ctr"/>
+          </a:p>
+        </p:txBody>
+      </p:sp>
+      <p:sp>
+        <p:nvSpPr>
+          <p:cNvPr id="48" name="TextBox 47"/>
+          <p:cNvSpPr txBox="1"/>
+          <p:nvPr/>
+        </p:nvSpPr>
+        <p:spPr>
+          <a:xfrm>
+            <a:off x="731520" y="5477255"/>
+            <a:ext cx="3474720" cy="219456"/>
+          </a:xfrm>
+          <a:prstGeom prst="rect">
+            <a:avLst/>
+          </a:prstGeom>
+          <a:noFill/>
+        </p:spPr>
+        <p:txBody>
+          <a:bodyPr wrap="square">
+            <a:spAutoFit/>
+          </a:bodyPr>
+          <a:lstStyle/>
+          <a:p>
+            <a:pPr algn="l"/>
+            <a:r>
+              <a:rPr sz="1200" b="1" i="0">
+                <a:solidFill>
+                  <a:srgbClr val="B45A00"/>
+                </a:solidFill>
+              </a:rPr>
+              <a:t>只滿足「跑很久」，但沒有其他事做</a:t>
+            </a:r>
+          </a:p>
+        </p:txBody>
+      </p:sp>
+      <p:sp>
+        <p:nvSpPr>
+          <p:cNvPr id="49" name="TextBox 48"/>
+          <p:cNvSpPr txBox="1"/>
+          <p:nvPr/>
+        </p:nvSpPr>
+        <p:spPr>
+          <a:xfrm>
+            <a:off x="4297680" y="5477255"/>
+            <a:ext cx="7132320" cy="219456"/>
+          </a:xfrm>
+          <a:prstGeom prst="rect">
+            <a:avLst/>
+          </a:prstGeom>
+          <a:noFill/>
+        </p:spPr>
+        <p:txBody>
+          <a:bodyPr wrap="square">
+            <a:spAutoFit/>
+          </a:bodyPr>
+          <a:lstStyle/>
+          <a:p>
+            <a:pPr algn="l"/>
+            <a:r>
+              <a:rPr sz="1200" b="0" i="0">
                 <a:solidFill>
                   <a:srgbClr val="1A222E"/>
                 </a:solidFill>
               </a:rPr>
-              <a:t>❷  收到 &lt;task-notification: task_id completed&gt;  →  Claude 得知任務結束，可以去取結果了</a:t>
-            </a:r>
+              <a:t>同步跑就好，background 只是多管理一個 task_id</a:t>
+            </a:r>
+          </a:p>
+        </p:txBody>
+      </p:sp>
+      <p:sp>
+        <p:nvSpPr>
+          <p:cNvPr id="50" name="TextBox 49"/>
+          <p:cNvSpPr txBox="1"/>
+          <p:nvPr/>
+        </p:nvSpPr>
+        <p:spPr>
+          <a:xfrm>
+            <a:off x="731520" y="5724143"/>
+            <a:ext cx="10789920" cy="219456"/>
+          </a:xfrm>
+          <a:prstGeom prst="rect">
+            <a:avLst/>
+          </a:prstGeom>
+          <a:noFill/>
+        </p:spPr>
+        <p:txBody>
+          <a:bodyPr wrap="square">
+            <a:spAutoFit/>
+          </a:bodyPr>
+          <a:lstStyle/>
+          <a:p>
+            <a:pPr algn="l"/>
+            <a:r>
+              <a:rPr sz="1100" b="0" i="1">
+                <a:solidFill>
+                  <a:srgbClr val="55657A"/>
+                </a:solidFill>
+              </a:rPr>
+              <a:t>例：只是裝套件，裝完才能繼續 → 直接 Bash("npm install") 等完即可</a:t>
+            </a:r>
+          </a:p>
+        </p:txBody>
+      </p:sp>
+      <p:sp>
+        <p:nvSpPr>
+          <p:cNvPr id="51" name="Rectangle 50"/>
+          <p:cNvSpPr/>
+          <p:nvPr/>
+        </p:nvSpPr>
+        <p:spPr>
+          <a:xfrm>
+            <a:off x="457200" y="6016751"/>
+            <a:ext cx="11155680" cy="548640"/>
+          </a:xfrm>
+          <a:prstGeom prst="rect">
+            <a:avLst/>
+          </a:prstGeom>
+          <a:solidFill>
+            <a:srgbClr val="F8FAFC"/>
+          </a:solidFill>
+          <a:ln>
+            <a:noFill/>
+          </a:ln>
+        </p:spPr>
+        <p:style>
+          <a:lnRef idx="1">
+            <a:schemeClr val="accent1"/>
+          </a:lnRef>
+          <a:fillRef idx="3">
+            <a:schemeClr val="accent1"/>
+          </a:fillRef>
+          <a:effectRef idx="2">
+            <a:schemeClr val="accent1"/>
+          </a:effectRef>
+          <a:fontRef idx="minor">
+            <a:schemeClr val="lt1"/>
+          </a:fontRef>
+        </p:style>
+        <p:txBody>
+          <a:bodyPr rtlCol="0" anchor="ctr"/>
+          <a:lstStyle/>
+          <a:p>
+            <a:pPr algn="ctr"/>
+          </a:p>
+        </p:txBody>
+      </p:sp>
+      <p:sp>
+        <p:nvSpPr>
+          <p:cNvPr id="52" name="Rectangle 51"/>
+          <p:cNvSpPr/>
+          <p:nvPr/>
+        </p:nvSpPr>
+        <p:spPr>
+          <a:xfrm>
+            <a:off x="457200" y="6016751"/>
+            <a:ext cx="164592" cy="548640"/>
+          </a:xfrm>
+          <a:prstGeom prst="rect">
+            <a:avLst/>
+          </a:prstGeom>
+          <a:solidFill>
+            <a:srgbClr val="55657A"/>
+          </a:solidFill>
+          <a:ln>
+            <a:noFill/>
+          </a:ln>
+        </p:spPr>
+        <p:style>
+          <a:lnRef idx="1">
+            <a:schemeClr val="accent1"/>
+          </a:lnRef>
+          <a:fillRef idx="3">
+            <a:schemeClr val="accent1"/>
+          </a:fillRef>
+          <a:effectRef idx="2">
+            <a:schemeClr val="accent1"/>
+          </a:effectRef>
+          <a:fontRef idx="minor">
+            <a:schemeClr val="lt1"/>
+          </a:fontRef>
+        </p:style>
+        <p:txBody>
+          <a:bodyPr rtlCol="0" anchor="ctr"/>
+          <a:lstStyle/>
+          <a:p>
+            <a:pPr algn="ctr"/>
           </a:p>
         </p:txBody>
       </p:sp>
@@ -18132,62 +18178,130 @@
         </p:nvSpPr>
         <p:spPr>
           <a:xfrm>
-            <a:off x="621792" y="6126479"/>
-            <a:ext cx="10789920" cy="256032"/>
-          </a:xfrm>
-          <a:prstGeom prst="rect">
-            <a:avLst/>
-          </a:prstGeom>
-          <a:noFill/>
-        </p:spPr>
-        <p:txBody>
-          <a:bodyPr wrap="square">
-            <a:spAutoFit/>
-          </a:bodyPr>
-          <a:lstStyle/>
-          <a:p>
-            <a:pPr algn="l"/>
-            <a:r>
-              <a:rPr sz="1300" b="0" i="0">
+            <a:off x="731520" y="6062471"/>
+            <a:ext cx="3474720" cy="219456"/>
+          </a:xfrm>
+          <a:prstGeom prst="rect">
+            <a:avLst/>
+          </a:prstGeom>
+          <a:noFill/>
+        </p:spPr>
+        <p:txBody>
+          <a:bodyPr wrap="square">
+            <a:spAutoFit/>
+          </a:bodyPr>
+          <a:lstStyle/>
+          <a:p>
+            <a:pPr algn="l"/>
+            <a:r>
+              <a:rPr sz="1200" b="1" i="0">
+                <a:solidFill>
+                  <a:srgbClr val="55657A"/>
+                </a:solidFill>
+              </a:rPr>
+              <a:t>直接同步執行</a:t>
+            </a:r>
+          </a:p>
+        </p:txBody>
+      </p:sp>
+      <p:sp>
+        <p:nvSpPr>
+          <p:cNvPr id="54" name="TextBox 53"/>
+          <p:cNvSpPr txBox="1"/>
+          <p:nvPr/>
+        </p:nvSpPr>
+        <p:spPr>
+          <a:xfrm>
+            <a:off x="4297680" y="6062471"/>
+            <a:ext cx="7132320" cy="219456"/>
+          </a:xfrm>
+          <a:prstGeom prst="rect">
+            <a:avLst/>
+          </a:prstGeom>
+          <a:noFill/>
+        </p:spPr>
+        <p:txBody>
+          <a:bodyPr wrap="square">
+            <a:spAutoFit/>
+          </a:bodyPr>
+          <a:lstStyle/>
+          <a:p>
+            <a:pPr algn="l"/>
+            <a:r>
+              <a:rPr sz="1200" b="0" i="0">
                 <a:solidFill>
                   <a:srgbClr val="1A222E"/>
                 </a:solidFill>
               </a:rPr>
-              <a:t>❸  TaskOutput(task_id)  →  取得完整 test 輸出，分析哪些失敗，進行下一輪修正</a:t>
-            </a:r>
-          </a:p>
-        </p:txBody>
-      </p:sp>
-      <p:sp>
-        <p:nvSpPr>
-          <p:cNvPr id="54" name="TextBox 53"/>
-          <p:cNvSpPr txBox="1"/>
-          <p:nvPr/>
-        </p:nvSpPr>
-        <p:spPr>
-          <a:xfrm>
-            <a:off x="457200" y="6547103"/>
-            <a:ext cx="11155680" cy="256032"/>
-          </a:xfrm>
-          <a:prstGeom prst="rect">
-            <a:avLst/>
-          </a:prstGeom>
-          <a:noFill/>
-        </p:spPr>
-        <p:txBody>
-          <a:bodyPr wrap="square">
-            <a:spAutoFit/>
-          </a:bodyPr>
-          <a:lstStyle/>
-          <a:p>
-            <a:pPr algn="l"/>
-            <a:r>
-              <a:rPr sz="1300" b="0" i="1">
+              <a:t>瞬間完成，或下一步必須等結果才能決定方向</a:t>
+            </a:r>
+          </a:p>
+        </p:txBody>
+      </p:sp>
+      <p:sp>
+        <p:nvSpPr>
+          <p:cNvPr id="55" name="TextBox 54"/>
+          <p:cNvSpPr txBox="1"/>
+          <p:nvPr/>
+        </p:nvSpPr>
+        <p:spPr>
+          <a:xfrm>
+            <a:off x="731520" y="6309359"/>
+            <a:ext cx="10789920" cy="219456"/>
+          </a:xfrm>
+          <a:prstGeom prst="rect">
+            <a:avLst/>
+          </a:prstGeom>
+          <a:noFill/>
+        </p:spPr>
+        <p:txBody>
+          <a:bodyPr wrap="square">
+            <a:spAutoFit/>
+          </a:bodyPr>
+          <a:lstStyle/>
+          <a:p>
+            <a:pPr algn="l"/>
+            <a:r>
+              <a:rPr sz="1100" b="0" i="1">
                 <a:solidFill>
                   <a:srgbClr val="55657A"/>
                 </a:solidFill>
               </a:rPr>
-              <a:t>CronCreate 則用於定時排程，例如：每 10 分鐘自動執行一次 lint check，session 期間持續運作</a:t>
+              <a:t>例：git diff 輸出決定要修哪個檔 → 必須等結果；git status / ls 等瞬間完成</a:t>
+            </a:r>
+          </a:p>
+        </p:txBody>
+      </p:sp>
+      <p:sp>
+        <p:nvSpPr>
+          <p:cNvPr id="56" name="TextBox 55"/>
+          <p:cNvSpPr txBox="1"/>
+          <p:nvPr/>
+        </p:nvSpPr>
+        <p:spPr>
+          <a:xfrm>
+            <a:off x="457200" y="6638543"/>
+            <a:ext cx="11155680" cy="219456"/>
+          </a:xfrm>
+          <a:prstGeom prst="rect">
+            <a:avLst/>
+          </a:prstGeom>
+          <a:noFill/>
+        </p:spPr>
+        <p:txBody>
+          <a:bodyPr wrap="square">
+            <a:spAutoFit/>
+          </a:bodyPr>
+          <a:lstStyle/>
+          <a:p>
+            <a:pPr algn="l"/>
+            <a:r>
+              <a:rPr sz="1100" b="0" i="1">
+                <a:solidFill>
+                  <a:srgbClr val="55657A"/>
+                </a:solidFill>
+              </a:rPr>
+              <a:t>實測（JSONL）：TaskOutput(task_id, block=True) 可直接等任務完成；TaskCreate 由 framework 自動觸發</a:t>
             </a:r>
           </a:p>
         </p:txBody>
@@ -19307,7 +19421,7 @@
                   <a:srgbClr val="1A222E"/>
                 </a:solidFill>
               </a:rPr>
-              <a:t>工具深入：Agent、Skill</a:t>
+              <a:t>工具深入：Agent、Skill、Task</a:t>
             </a:r>
           </a:p>
         </p:txBody>
@@ -19468,13 +19582,124 @@
       </p:sp>
       <p:sp>
         <p:nvSpPr>
-          <p:cNvPr id="35" name="Rectangle 34"/>
+          <p:cNvPr id="35" name="TextBox 34"/>
+          <p:cNvSpPr txBox="1"/>
+          <p:nvPr/>
+        </p:nvSpPr>
+        <p:spPr>
+          <a:xfrm>
+            <a:off x="685800" y="6053328"/>
+            <a:ext cx="685800" cy="365760"/>
+          </a:xfrm>
+          <a:prstGeom prst="rect">
+            <a:avLst/>
+          </a:prstGeom>
+          <a:noFill/>
+        </p:spPr>
+        <p:txBody>
+          <a:bodyPr wrap="square">
+            <a:spAutoFit/>
+          </a:bodyPr>
+          <a:lstStyle/>
+          <a:p>
+            <a:pPr algn="l"/>
+            <a:r>
+              <a:rPr sz="1600" b="1" i="0">
+                <a:solidFill>
+                  <a:srgbClr val="057A50"/>
+                </a:solidFill>
+              </a:rPr>
+              <a:t>08</a:t>
+            </a:r>
+          </a:p>
+        </p:txBody>
+      </p:sp>
+      <p:sp>
+        <p:nvSpPr>
+          <p:cNvPr id="36" name="TextBox 35"/>
+          <p:cNvSpPr txBox="1"/>
+          <p:nvPr/>
+        </p:nvSpPr>
+        <p:spPr>
+          <a:xfrm>
+            <a:off x="1444752" y="6053328"/>
+            <a:ext cx="10149840" cy="365760"/>
+          </a:xfrm>
+          <a:prstGeom prst="rect">
+            <a:avLst/>
+          </a:prstGeom>
+          <a:noFill/>
+        </p:spPr>
+        <p:txBody>
+          <a:bodyPr wrap="square">
+            <a:spAutoFit/>
+          </a:bodyPr>
+          <a:lstStyle/>
+          <a:p>
+            <a:pPr algn="l"/>
+            <a:r>
+              <a:rPr sz="1600" b="0" i="0">
+                <a:solidFill>
+                  <a:srgbClr val="1A222E"/>
+                </a:solidFill>
+              </a:rPr>
+              <a:t>資訊來源 — 機制驗證方法</a:t>
+            </a:r>
+          </a:p>
+        </p:txBody>
+      </p:sp>
+      <p:sp>
+        <p:nvSpPr>
+          <p:cNvPr id="37" name="Rectangle 36"/>
           <p:cNvSpPr/>
           <p:nvPr/>
         </p:nvSpPr>
         <p:spPr>
           <a:xfrm>
-            <a:off x="457200" y="5961888"/>
+            <a:off x="457200" y="6492240"/>
+            <a:ext cx="11274552" cy="41148"/>
+          </a:xfrm>
+          <a:prstGeom prst="rect">
+            <a:avLst/>
+          </a:prstGeom>
+          <a:solidFill>
+            <a:srgbClr val="E2E8F0"/>
+          </a:solidFill>
+          <a:ln>
+            <a:noFill/>
+          </a:ln>
+        </p:spPr>
+        <p:style>
+          <a:lnRef idx="1">
+            <a:schemeClr val="accent1"/>
+          </a:lnRef>
+          <a:fillRef idx="3">
+            <a:schemeClr val="accent1"/>
+          </a:fillRef>
+          <a:effectRef idx="2">
+            <a:schemeClr val="accent1"/>
+          </a:effectRef>
+          <a:fontRef idx="minor">
+            <a:schemeClr val="lt1"/>
+          </a:fontRef>
+        </p:style>
+        <p:txBody>
+          <a:bodyPr rtlCol="0" anchor="ctr"/>
+          <a:lstStyle/>
+          <a:p>
+            <a:pPr algn="ctr"/>
+          </a:p>
+        </p:txBody>
+      </p:sp>
+      <p:sp>
+        <p:nvSpPr>
+          <p:cNvPr id="38" name="Rectangle 37"/>
+          <p:cNvSpPr/>
+          <p:nvPr/>
+        </p:nvSpPr>
+        <p:spPr>
+          <a:xfrm>
+            <a:off x="457200" y="6492240"/>
             <a:ext cx="11274552" cy="548640"/>
           </a:xfrm>
           <a:prstGeom prst="rect">
@@ -19511,13 +19736,13 @@
       </p:sp>
       <p:sp>
         <p:nvSpPr>
-          <p:cNvPr id="36" name="TextBox 35"/>
-          <p:cNvSpPr txBox="1"/>
-          <p:nvPr/>
-        </p:nvSpPr>
-        <p:spPr>
-          <a:xfrm>
-            <a:off x="594360" y="6071616"/>
+          <p:cNvPr id="39" name="TextBox 38"/>
+          <p:cNvSpPr txBox="1"/>
+          <p:nvPr/>
+        </p:nvSpPr>
+        <p:spPr>
+          <a:xfrm>
+            <a:off x="594360" y="6601968"/>
             <a:ext cx="1097280" cy="347472"/>
           </a:xfrm>
           <a:prstGeom prst="rect">
@@ -19545,13 +19770,13 @@
       </p:sp>
       <p:sp>
         <p:nvSpPr>
-          <p:cNvPr id="37" name="TextBox 36"/>
-          <p:cNvSpPr txBox="1"/>
-          <p:nvPr/>
-        </p:nvSpPr>
-        <p:spPr>
-          <a:xfrm>
-            <a:off x="1719072" y="6071616"/>
+          <p:cNvPr id="40" name="TextBox 39"/>
+          <p:cNvSpPr txBox="1"/>
+          <p:nvPr/>
+        </p:nvSpPr>
+        <p:spPr>
+          <a:xfrm>
+            <a:off x="1719072" y="6601968"/>
             <a:ext cx="9875520" cy="347472"/>
           </a:xfrm>
           <a:prstGeom prst="rect">
@@ -19579,13 +19804,13 @@
       </p:sp>
       <p:sp>
         <p:nvSpPr>
-          <p:cNvPr id="38" name="Rectangle 37"/>
+          <p:cNvPr id="41" name="Rectangle 40"/>
           <p:cNvSpPr/>
           <p:nvPr/>
         </p:nvSpPr>
         <p:spPr>
           <a:xfrm>
-            <a:off x="457200" y="6528816"/>
+            <a:off x="457200" y="7059168"/>
             <a:ext cx="11274552" cy="41148"/>
           </a:xfrm>
           <a:prstGeom prst="rect">
@@ -19622,13 +19847,13 @@
       </p:sp>
       <p:sp>
         <p:nvSpPr>
-          <p:cNvPr id="39" name="TextBox 38"/>
-          <p:cNvSpPr txBox="1"/>
-          <p:nvPr/>
-        </p:nvSpPr>
-        <p:spPr>
-          <a:xfrm>
-            <a:off x="685800" y="6620256"/>
+          <p:cNvPr id="42" name="TextBox 41"/>
+          <p:cNvSpPr txBox="1"/>
+          <p:nvPr/>
+        </p:nvSpPr>
+        <p:spPr>
+          <a:xfrm>
+            <a:off x="685800" y="7150608"/>
             <a:ext cx="685800" cy="365760"/>
           </a:xfrm>
           <a:prstGeom prst="rect">
@@ -19649,20 +19874,20 @@
                   <a:srgbClr val="B45A00"/>
                 </a:solidFill>
               </a:rPr>
-              <a:t>08</a:t>
-            </a:r>
-          </a:p>
-        </p:txBody>
-      </p:sp>
-      <p:sp>
-        <p:nvSpPr>
-          <p:cNvPr id="40" name="TextBox 39"/>
-          <p:cNvSpPr txBox="1"/>
-          <p:nvPr/>
-        </p:nvSpPr>
-        <p:spPr>
-          <a:xfrm>
-            <a:off x="1444752" y="6620256"/>
+              <a:t>09</a:t>
+            </a:r>
+          </a:p>
+        </p:txBody>
+      </p:sp>
+      <p:sp>
+        <p:nvSpPr>
+          <p:cNvPr id="43" name="TextBox 42"/>
+          <p:cNvSpPr txBox="1"/>
+          <p:nvPr/>
+        </p:nvSpPr>
+        <p:spPr>
+          <a:xfrm>
+            <a:off x="1444752" y="7150608"/>
             <a:ext cx="10149840" cy="365760"/>
           </a:xfrm>
           <a:prstGeom prst="rect">
@@ -19765,41 +19990,75 @@
         </p:nvSpPr>
         <p:spPr>
           <a:xfrm>
-            <a:off x="502920" y="164592"/>
-            <a:ext cx="11155680" cy="640080"/>
-          </a:xfrm>
-          <a:prstGeom prst="rect">
-            <a:avLst/>
-          </a:prstGeom>
-          <a:noFill/>
-        </p:spPr>
-        <p:txBody>
-          <a:bodyPr wrap="square">
-            <a:spAutoFit/>
-          </a:bodyPr>
-          <a:lstStyle/>
-          <a:p>
-            <a:pPr algn="l"/>
-            <a:r>
-              <a:rPr sz="2600" b="1" i="0">
+            <a:off x="502920" y="146304"/>
+            <a:ext cx="11155680" cy="475488"/>
+          </a:xfrm>
+          <a:prstGeom prst="rect">
+            <a:avLst/>
+          </a:prstGeom>
+          <a:noFill/>
+        </p:spPr>
+        <p:txBody>
+          <a:bodyPr wrap="square">
+            <a:spAutoFit/>
+          </a:bodyPr>
+          <a:lstStyle/>
+          <a:p>
+            <a:pPr algn="l"/>
+            <a:r>
+              <a:rPr sz="2400" b="1" i="0">
                 <a:solidFill>
                   <a:srgbClr val="1A222E"/>
                 </a:solidFill>
               </a:rPr>
-              <a:t>05  系統機制 — Hooks（事件驅動擴充）</a:t>
-            </a:r>
-          </a:p>
-        </p:txBody>
-      </p:sp>
-      <p:sp>
-        <p:nvSpPr>
-          <p:cNvPr id="4" name="Rectangle 3"/>
+              <a:t>07  系統機制 — Hooks（事件驅動擴充）</a:t>
+            </a:r>
+          </a:p>
+        </p:txBody>
+      </p:sp>
+      <p:sp>
+        <p:nvSpPr>
+          <p:cNvPr id="4" name="TextBox 3"/>
+          <p:cNvSpPr txBox="1"/>
+          <p:nvPr/>
+        </p:nvSpPr>
+        <p:spPr>
+          <a:xfrm>
+            <a:off x="502920" y="640080"/>
+            <a:ext cx="11155680" cy="274320"/>
+          </a:xfrm>
+          <a:prstGeom prst="rect">
+            <a:avLst/>
+          </a:prstGeom>
+          <a:noFill/>
+        </p:spPr>
+        <p:txBody>
+          <a:bodyPr wrap="square">
+            <a:spAutoFit/>
+          </a:bodyPr>
+          <a:lstStyle/>
+          <a:p>
+            <a:pPr algn="l"/>
+            <a:r>
+              <a:rPr sz="1300" b="0" i="1">
+                <a:solidFill>
+                  <a:srgbClr val="55657A"/>
+                </a:solidFill>
+              </a:rPr>
+              <a:t>預設無任何 hook；需自行在 settings.json 設定才會生效</a:t>
+            </a:r>
+          </a:p>
+        </p:txBody>
+      </p:sp>
+      <p:sp>
+        <p:nvSpPr>
+          <p:cNvPr id="5" name="Rectangle 4"/>
           <p:cNvSpPr/>
           <p:nvPr/>
         </p:nvSpPr>
         <p:spPr>
           <a:xfrm>
-            <a:off x="457200" y="914400"/>
+            <a:off x="457200" y="950976"/>
             <a:ext cx="11274552" cy="41148"/>
           </a:xfrm>
           <a:prstGeom prst="rect">
@@ -19836,7 +20095,7 @@
       </p:sp>
       <p:sp>
         <p:nvSpPr>
-          <p:cNvPr id="5" name="TextBox 4"/>
+          <p:cNvPr id="6" name="TextBox 5"/>
           <p:cNvSpPr txBox="1"/>
           <p:nvPr/>
         </p:nvSpPr>
@@ -19870,7 +20129,7 @@
       </p:sp>
       <p:sp>
         <p:nvSpPr>
-          <p:cNvPr id="6" name="Rectangle 5"/>
+          <p:cNvPr id="7" name="Rectangle 6"/>
           <p:cNvSpPr/>
           <p:nvPr/>
         </p:nvSpPr>
@@ -19913,7 +20172,7 @@
       </p:sp>
       <p:sp>
         <p:nvSpPr>
-          <p:cNvPr id="7" name="TextBox 6"/>
+          <p:cNvPr id="8" name="TextBox 7"/>
           <p:cNvSpPr txBox="1"/>
           <p:nvPr/>
         </p:nvSpPr>
@@ -19947,7 +20206,7 @@
       </p:sp>
       <p:sp>
         <p:nvSpPr>
-          <p:cNvPr id="8" name="TextBox 7"/>
+          <p:cNvPr id="9" name="TextBox 8"/>
           <p:cNvSpPr txBox="1"/>
           <p:nvPr/>
         </p:nvSpPr>
@@ -19981,7 +20240,7 @@
       </p:sp>
       <p:sp>
         <p:nvSpPr>
-          <p:cNvPr id="9" name="TextBox 8"/>
+          <p:cNvPr id="10" name="TextBox 9"/>
           <p:cNvSpPr txBox="1"/>
           <p:nvPr/>
         </p:nvSpPr>
@@ -20015,7 +20274,7 @@
       </p:sp>
       <p:sp>
         <p:nvSpPr>
-          <p:cNvPr id="10" name="Rectangle 9"/>
+          <p:cNvPr id="11" name="Rectangle 10"/>
           <p:cNvSpPr/>
           <p:nvPr/>
         </p:nvSpPr>
@@ -20058,7 +20317,7 @@
       </p:sp>
       <p:sp>
         <p:nvSpPr>
-          <p:cNvPr id="11" name="TextBox 10"/>
+          <p:cNvPr id="12" name="TextBox 11"/>
           <p:cNvSpPr txBox="1"/>
           <p:nvPr/>
         </p:nvSpPr>
@@ -20092,7 +20351,7 @@
       </p:sp>
       <p:sp>
         <p:nvSpPr>
-          <p:cNvPr id="12" name="TextBox 11"/>
+          <p:cNvPr id="13" name="TextBox 12"/>
           <p:cNvSpPr txBox="1"/>
           <p:nvPr/>
         </p:nvSpPr>
@@ -20126,7 +20385,7 @@
       </p:sp>
       <p:sp>
         <p:nvSpPr>
-          <p:cNvPr id="13" name="TextBox 12"/>
+          <p:cNvPr id="14" name="TextBox 13"/>
           <p:cNvSpPr txBox="1"/>
           <p:nvPr/>
         </p:nvSpPr>
@@ -20160,7 +20419,7 @@
       </p:sp>
       <p:sp>
         <p:nvSpPr>
-          <p:cNvPr id="14" name="Rectangle 13"/>
+          <p:cNvPr id="15" name="Rectangle 14"/>
           <p:cNvSpPr/>
           <p:nvPr/>
         </p:nvSpPr>
@@ -20203,7 +20462,7 @@
       </p:sp>
       <p:sp>
         <p:nvSpPr>
-          <p:cNvPr id="15" name="TextBox 14"/>
+          <p:cNvPr id="16" name="TextBox 15"/>
           <p:cNvSpPr txBox="1"/>
           <p:nvPr/>
         </p:nvSpPr>
@@ -20237,7 +20496,7 @@
       </p:sp>
       <p:sp>
         <p:nvSpPr>
-          <p:cNvPr id="16" name="TextBox 15"/>
+          <p:cNvPr id="17" name="TextBox 16"/>
           <p:cNvSpPr txBox="1"/>
           <p:nvPr/>
         </p:nvSpPr>
@@ -20271,7 +20530,7 @@
       </p:sp>
       <p:sp>
         <p:nvSpPr>
-          <p:cNvPr id="17" name="TextBox 16"/>
+          <p:cNvPr id="18" name="TextBox 17"/>
           <p:cNvSpPr txBox="1"/>
           <p:nvPr/>
         </p:nvSpPr>
@@ -20305,7 +20564,7 @@
       </p:sp>
       <p:sp>
         <p:nvSpPr>
-          <p:cNvPr id="18" name="Rectangle 17"/>
+          <p:cNvPr id="19" name="Rectangle 18"/>
           <p:cNvSpPr/>
           <p:nvPr/>
         </p:nvSpPr>
@@ -20348,7 +20607,7 @@
       </p:sp>
       <p:sp>
         <p:nvSpPr>
-          <p:cNvPr id="19" name="TextBox 18"/>
+          <p:cNvPr id="20" name="TextBox 19"/>
           <p:cNvSpPr txBox="1"/>
           <p:nvPr/>
         </p:nvSpPr>
@@ -20382,7 +20641,7 @@
       </p:sp>
       <p:sp>
         <p:nvSpPr>
-          <p:cNvPr id="20" name="TextBox 19"/>
+          <p:cNvPr id="21" name="TextBox 20"/>
           <p:cNvSpPr txBox="1"/>
           <p:nvPr/>
         </p:nvSpPr>
@@ -20416,7 +20675,7 @@
       </p:sp>
       <p:sp>
         <p:nvSpPr>
-          <p:cNvPr id="21" name="TextBox 20"/>
+          <p:cNvPr id="22" name="TextBox 21"/>
           <p:cNvSpPr txBox="1"/>
           <p:nvPr/>
         </p:nvSpPr>
@@ -20450,7 +20709,7 @@
       </p:sp>
       <p:sp>
         <p:nvSpPr>
-          <p:cNvPr id="22" name="Rectangle 21"/>
+          <p:cNvPr id="23" name="Rectangle 22"/>
           <p:cNvSpPr/>
           <p:nvPr/>
         </p:nvSpPr>
@@ -20493,7 +20752,7 @@
       </p:sp>
       <p:sp>
         <p:nvSpPr>
-          <p:cNvPr id="23" name="TextBox 22"/>
+          <p:cNvPr id="24" name="TextBox 23"/>
           <p:cNvSpPr txBox="1"/>
           <p:nvPr/>
         </p:nvSpPr>
@@ -20527,7 +20786,7 @@
       </p:sp>
       <p:sp>
         <p:nvSpPr>
-          <p:cNvPr id="24" name="TextBox 23"/>
+          <p:cNvPr id="25" name="TextBox 24"/>
           <p:cNvSpPr txBox="1"/>
           <p:nvPr/>
         </p:nvSpPr>
@@ -20561,7 +20820,7 @@
       </p:sp>
       <p:sp>
         <p:nvSpPr>
-          <p:cNvPr id="25" name="TextBox 24"/>
+          <p:cNvPr id="26" name="TextBox 25"/>
           <p:cNvSpPr txBox="1"/>
           <p:nvPr/>
         </p:nvSpPr>
@@ -20595,7 +20854,7 @@
       </p:sp>
       <p:sp>
         <p:nvSpPr>
-          <p:cNvPr id="26" name="Rectangle 25"/>
+          <p:cNvPr id="27" name="Rectangle 26"/>
           <p:cNvSpPr/>
           <p:nvPr/>
         </p:nvSpPr>
@@ -20638,7 +20897,7 @@
       </p:sp>
       <p:sp>
         <p:nvSpPr>
-          <p:cNvPr id="27" name="TextBox 26"/>
+          <p:cNvPr id="28" name="TextBox 27"/>
           <p:cNvSpPr txBox="1"/>
           <p:nvPr/>
         </p:nvSpPr>
@@ -20672,7 +20931,7 @@
       </p:sp>
       <p:sp>
         <p:nvSpPr>
-          <p:cNvPr id="28" name="Rectangle 27"/>
+          <p:cNvPr id="29" name="Rectangle 28"/>
           <p:cNvSpPr/>
           <p:nvPr/>
         </p:nvSpPr>
@@ -20715,7 +20974,7 @@
       </p:sp>
       <p:sp>
         <p:nvSpPr>
-          <p:cNvPr id="29" name="TextBox 28"/>
+          <p:cNvPr id="30" name="TextBox 29"/>
           <p:cNvSpPr txBox="1"/>
           <p:nvPr/>
         </p:nvSpPr>
@@ -20749,7 +21008,7 @@
       </p:sp>
       <p:sp>
         <p:nvSpPr>
-          <p:cNvPr id="30" name="TextBox 29"/>
+          <p:cNvPr id="31" name="TextBox 30"/>
           <p:cNvSpPr txBox="1"/>
           <p:nvPr/>
         </p:nvSpPr>
@@ -20776,14 +21035,14 @@
                   <a:srgbClr val="1A222E"/>
                 </a:solidFill>
               </a:rPr>
-              <a:t>最常用。exit 2 可阻斷；async 背景執行。</a:t>
-            </a:r>
-          </a:p>
-        </p:txBody>
-      </p:sp>
-      <p:sp>
-        <p:nvSpPr>
-          <p:cNvPr id="31" name="TextBox 30"/>
+              <a:t>exit 0 = 放行；exit 2 = 取消這次 tool call；async = 背景跑，Claude 不等它</a:t>
+            </a:r>
+          </a:p>
+        </p:txBody>
+      </p:sp>
+      <p:sp>
+        <p:nvSpPr>
+          <p:cNvPr id="32" name="TextBox 31"/>
           <p:cNvSpPr txBox="1"/>
           <p:nvPr/>
         </p:nvSpPr>
@@ -20810,14 +21069,14 @@
                   <a:srgbClr val="55657A"/>
                 </a:solidFill>
               </a:rPr>
-              <a:t>例：PostToolUse → 存檔後自動跑 eslint</a:t>
-            </a:r>
-          </a:p>
-        </p:txBody>
-      </p:sp>
-      <p:sp>
-        <p:nvSpPr>
-          <p:cNvPr id="32" name="Rectangle 31"/>
+              <a:t>例：PreToolUse → 偵測到 rm 就 exit 2 阻止；PostToolUse → async 跑 eslint</a:t>
+            </a:r>
+          </a:p>
+        </p:txBody>
+      </p:sp>
+      <p:sp>
+        <p:nvSpPr>
+          <p:cNvPr id="33" name="Rectangle 32"/>
           <p:cNvSpPr/>
           <p:nvPr/>
         </p:nvSpPr>
@@ -20860,7 +21119,7 @@
       </p:sp>
       <p:sp>
         <p:nvSpPr>
-          <p:cNvPr id="33" name="TextBox 32"/>
+          <p:cNvPr id="34" name="TextBox 33"/>
           <p:cNvSpPr txBox="1"/>
           <p:nvPr/>
         </p:nvSpPr>
@@ -20887,14 +21146,14 @@
                   <a:srgbClr val="5B21B6"/>
                 </a:solidFill>
               </a:rPr>
-              <a:t>prompt — 讓另一個 LLM 評估</a:t>
-            </a:r>
-          </a:p>
-        </p:txBody>
-      </p:sp>
-      <p:sp>
-        <p:nvSpPr>
-          <p:cNvPr id="34" name="TextBox 33"/>
+              <a:t>prompt — 讓另一個 LLM 判斷</a:t>
+            </a:r>
+          </a:p>
+        </p:txBody>
+      </p:sp>
+      <p:sp>
+        <p:nvSpPr>
+          <p:cNvPr id="35" name="TextBox 34"/>
           <p:cNvSpPr txBox="1"/>
           <p:nvPr/>
         </p:nvSpPr>
@@ -20921,14 +21180,14 @@
                   <a:srgbClr val="1A222E"/>
                 </a:solidFill>
               </a:rPr>
-              <a:t>用輕量 model（Haiku）判斷是否允許，回傳 {ok: true/false}。</a:t>
-            </a:r>
-          </a:p>
-        </p:txBody>
-      </p:sp>
-      <p:sp>
-        <p:nvSpPr>
-          <p:cNvPr id="35" name="TextBox 34"/>
+              <a:t>用輕量 model（Haiku）評估，回傳 {ok: true/false}，ok=false 即阻斷</a:t>
+            </a:r>
+          </a:p>
+        </p:txBody>
+      </p:sp>
+      <p:sp>
+        <p:nvSpPr>
+          <p:cNvPr id="36" name="TextBox 35"/>
           <p:cNvSpPr txBox="1"/>
           <p:nvPr/>
         </p:nvSpPr>
@@ -20955,14 +21214,14 @@
                   <a:srgbClr val="55657A"/>
                 </a:solidFill>
               </a:rPr>
-              <a:t>例：PreToolUse → 判斷 Bash 命令是否有危險</a:t>
-            </a:r>
-          </a:p>
-        </p:txBody>
-      </p:sp>
-      <p:sp>
-        <p:nvSpPr>
-          <p:cNvPr id="36" name="Rectangle 35"/>
+              <a:t>例：PreToolUse → 讓 LLM 判斷這個 Bash 命令是否有危險</a:t>
+            </a:r>
+          </a:p>
+        </p:txBody>
+      </p:sp>
+      <p:sp>
+        <p:nvSpPr>
+          <p:cNvPr id="37" name="Rectangle 36"/>
           <p:cNvSpPr/>
           <p:nvPr/>
         </p:nvSpPr>
@@ -21005,7 +21264,7 @@
       </p:sp>
       <p:sp>
         <p:nvSpPr>
-          <p:cNvPr id="37" name="TextBox 36"/>
+          <p:cNvPr id="38" name="TextBox 37"/>
           <p:cNvSpPr txBox="1"/>
           <p:nvPr/>
         </p:nvSpPr>
@@ -21039,7 +21298,7 @@
       </p:sp>
       <p:sp>
         <p:nvSpPr>
-          <p:cNvPr id="38" name="TextBox 37"/>
+          <p:cNvPr id="39" name="TextBox 38"/>
           <p:cNvSpPr txBox="1"/>
           <p:nvPr/>
         </p:nvSpPr>
@@ -21066,14 +21325,14 @@
                   <a:srgbClr val="1A222E"/>
                 </a:solidFill>
               </a:rPr>
-              <a:t>呼叫 webhook，不需起額外程序，適合通知類場景。</a:t>
-            </a:r>
-          </a:p>
-        </p:txBody>
-      </p:sp>
-      <p:sp>
-        <p:nvSpPr>
-          <p:cNvPr id="39" name="TextBox 38"/>
+              <a:t>事件發生時呼叫 webhook，適合串接外部服務，不需額外程序</a:t>
+            </a:r>
+          </a:p>
+        </p:txBody>
+      </p:sp>
+      <p:sp>
+        <p:nvSpPr>
+          <p:cNvPr id="40" name="TextBox 39"/>
           <p:cNvSpPr txBox="1"/>
           <p:nvPr/>
         </p:nvSpPr>
@@ -21107,7 +21366,7 @@
       </p:sp>
       <p:sp>
         <p:nvSpPr>
-          <p:cNvPr id="40" name="Rectangle 39"/>
+          <p:cNvPr id="41" name="Rectangle 40"/>
           <p:cNvSpPr/>
           <p:nvPr/>
         </p:nvSpPr>
@@ -21150,7 +21409,7 @@
       </p:sp>
       <p:sp>
         <p:nvSpPr>
-          <p:cNvPr id="41" name="TextBox 40"/>
+          <p:cNvPr id="42" name="TextBox 41"/>
           <p:cNvSpPr txBox="1"/>
           <p:nvPr/>
         </p:nvSpPr>
@@ -21184,7 +21443,7 @@
       </p:sp>
       <p:sp>
         <p:nvSpPr>
-          <p:cNvPr id="42" name="TextBox 41"/>
+          <p:cNvPr id="43" name="TextBox 42"/>
           <p:cNvSpPr txBox="1"/>
           <p:nvPr/>
         </p:nvSpPr>
@@ -21211,14 +21470,14 @@
                   <a:srgbClr val="1A222E"/>
                 </a:solidFill>
               </a:rPr>
-              <a:t>最強大；subagent 有獨立 context 與工具，可多輪推理。</a:t>
-            </a:r>
-          </a:p>
-        </p:txBody>
-      </p:sp>
-      <p:sp>
-        <p:nvSpPr>
-          <p:cNvPr id="43" name="TextBox 42"/>
+              <a:t>最強大；subagent 有獨立 context 與工具，可多輪推理後才決定放行或阻斷</a:t>
+            </a:r>
+          </a:p>
+        </p:txBody>
+      </p:sp>
+      <p:sp>
+        <p:nvSpPr>
+          <p:cNvPr id="44" name="TextBox 43"/>
           <p:cNvSpPr txBox="1"/>
           <p:nvPr/>
         </p:nvSpPr>
@@ -21348,7 +21607,7 @@
                   <a:srgbClr val="1A222E"/>
                 </a:solidFill>
               </a:rPr>
-              <a:t>05  系統機制 — Permission 系統</a:t>
+              <a:t>07  系統機制 — Permission 系統</a:t>
             </a:r>
           </a:p>
         </p:txBody>
@@ -22361,41 +22620,75 @@
         </p:nvSpPr>
         <p:spPr>
           <a:xfrm>
-            <a:off x="502920" y="164592"/>
-            <a:ext cx="11155680" cy="640080"/>
-          </a:xfrm>
-          <a:prstGeom prst="rect">
-            <a:avLst/>
-          </a:prstGeom>
-          <a:noFill/>
-        </p:spPr>
-        <p:txBody>
-          <a:bodyPr wrap="square">
-            <a:spAutoFit/>
-          </a:bodyPr>
-          <a:lstStyle/>
-          <a:p>
-            <a:pPr algn="l"/>
-            <a:r>
-              <a:rPr sz="2600" b="1" i="0">
+            <a:off x="502920" y="146304"/>
+            <a:ext cx="11155680" cy="475488"/>
+          </a:xfrm>
+          <a:prstGeom prst="rect">
+            <a:avLst/>
+          </a:prstGeom>
+          <a:noFill/>
+        </p:spPr>
+        <p:txBody>
+          <a:bodyPr wrap="square">
+            <a:spAutoFit/>
+          </a:bodyPr>
+          <a:lstStyle/>
+          <a:p>
+            <a:pPr algn="l"/>
+            <a:r>
+              <a:rPr sz="2400" b="1" i="0">
                 <a:solidFill>
                   <a:srgbClr val="1A222E"/>
                 </a:solidFill>
               </a:rPr>
-              <a:t>06  資訊來源 — 本簡報的機制如何驗證</a:t>
-            </a:r>
-          </a:p>
-        </p:txBody>
-      </p:sp>
-      <p:sp>
-        <p:nvSpPr>
-          <p:cNvPr id="4" name="Rectangle 3"/>
+              <a:t>08  資訊來源 — 本簡報的機制如何驗證</a:t>
+            </a:r>
+          </a:p>
+        </p:txBody>
+      </p:sp>
+      <p:sp>
+        <p:nvSpPr>
+          <p:cNvPr id="4" name="TextBox 3"/>
+          <p:cNvSpPr txBox="1"/>
+          <p:nvPr/>
+        </p:nvSpPr>
+        <p:spPr>
+          <a:xfrm>
+            <a:off x="502920" y="640080"/>
+            <a:ext cx="11155680" cy="274320"/>
+          </a:xfrm>
+          <a:prstGeom prst="rect">
+            <a:avLst/>
+          </a:prstGeom>
+          <a:noFill/>
+        </p:spPr>
+        <p:txBody>
+          <a:bodyPr wrap="square">
+            <a:spAutoFit/>
+          </a:bodyPr>
+          <a:lstStyle/>
+          <a:p>
+            <a:pPr algn="l"/>
+            <a:r>
+              <a:rPr sz="1300" b="0" i="1">
+                <a:solidFill>
+                  <a:srgbClr val="55657A"/>
+                </a:solidFill>
+              </a:rPr>
+              <a:t>三種來源各有優先順序：JSONL &gt; 官方文件 &gt; 原始碼</a:t>
+            </a:r>
+          </a:p>
+        </p:txBody>
+      </p:sp>
+      <p:sp>
+        <p:nvSpPr>
+          <p:cNvPr id="5" name="Rectangle 4"/>
           <p:cNvSpPr/>
           <p:nvPr/>
         </p:nvSpPr>
         <p:spPr>
           <a:xfrm>
-            <a:off x="457200" y="914400"/>
+            <a:off x="457200" y="950976"/>
             <a:ext cx="11274552" cy="41148"/>
           </a:xfrm>
           <a:prstGeom prst="rect">
@@ -22427,40 +22720,6 @@
           <a:lstStyle/>
           <a:p>
             <a:pPr algn="ctr"/>
-          </a:p>
-        </p:txBody>
-      </p:sp>
-      <p:sp>
-        <p:nvSpPr>
-          <p:cNvPr id="5" name="TextBox 4"/>
-          <p:cNvSpPr txBox="1"/>
-          <p:nvPr/>
-        </p:nvSpPr>
-        <p:spPr>
-          <a:xfrm>
-            <a:off x="502920" y="987552"/>
-            <a:ext cx="10972800" cy="384048"/>
-          </a:xfrm>
-          <a:prstGeom prst="rect">
-            <a:avLst/>
-          </a:prstGeom>
-          <a:noFill/>
-        </p:spPr>
-        <p:txBody>
-          <a:bodyPr wrap="square">
-            <a:spAutoFit/>
-          </a:bodyPr>
-          <a:lstStyle/>
-          <a:p>
-            <a:pPr algn="l"/>
-            <a:r>
-              <a:rPr sz="1400" b="0" i="1">
-                <a:solidFill>
-                  <a:srgbClr val="55657A"/>
-                </a:solidFill>
-              </a:rPr>
-              <a:t>三種來源各有優先順序：JSONL &gt; 官方文件 &gt; 原始碼</a:t>
-            </a:r>
           </a:p>
         </p:txBody>
       </p:sp>
@@ -23228,7 +23487,7 @@
                   <a:srgbClr val="1A222E"/>
                 </a:solidFill>
               </a:rPr>
-              <a:t>06  Takeaways</a:t>
+              <a:t>09  Takeaways</a:t>
             </a:r>
           </a:p>
         </p:txBody>
@@ -23604,7 +23863,7 @@
                   <a:srgbClr val="1A222E"/>
                 </a:solidFill>
               </a:rPr>
-              <a:t>9 個預載（零延遲）vs 16 個延遲載入（省 token，透過 ToolSearch，+2-3 秒）。根據使用頻率權衡 latency 與 token budget。</a:t>
+              <a:t>9 個預載（零延遲）vs 17 個延遲載入（省 token，透過 ToolSearch，+2-3 秒）。根據使用頻率權衡 latency 與 token budget。</a:t>
             </a:r>
           </a:p>
         </p:txBody>
@@ -23982,6 +24241,1203 @@
           <a:lstStyle/>
           <a:p>
             <a:pPr algn="ctr"/>
+          </a:p>
+        </p:txBody>
+      </p:sp>
+    </p:spTree>
+  </p:cSld>
+  <p:clrMapOvr>
+    <a:masterClrMapping/>
+  </p:clrMapOvr>
+</p:sld>
+</file>
+
+<file path=ppt/slides/slide24.xml><?xml version="1.0" encoding="utf-8"?>
+<p:sld xmlns:a="http://schemas.openxmlformats.org/drawingml/2006/main" xmlns:p="http://schemas.openxmlformats.org/presentationml/2006/main" xmlns:r="http://schemas.openxmlformats.org/officeDocument/2006/relationships">
+  <p:cSld>
+    <p:bg>
+      <p:bgPr>
+        <a:solidFill>
+          <a:srgbClr val="FFFFFF"/>
+        </a:solidFill>
+        <a:effectLst/>
+      </p:bgPr>
+    </p:bg>
+    <p:spTree>
+      <p:nvGrpSpPr>
+        <p:cNvPr id="1" name=""/>
+        <p:cNvGrpSpPr/>
+        <p:nvPr/>
+      </p:nvGrpSpPr>
+      <p:grpSpPr/>
+      <p:sp>
+        <p:nvSpPr>
+          <p:cNvPr id="2" name="Rectangle 1"/>
+          <p:cNvSpPr/>
+          <p:nvPr/>
+        </p:nvSpPr>
+        <p:spPr>
+          <a:xfrm>
+            <a:off x="0" y="0"/>
+            <a:ext cx="12188952" cy="91440"/>
+          </a:xfrm>
+          <a:prstGeom prst="rect">
+            <a:avLst/>
+          </a:prstGeom>
+          <a:solidFill>
+            <a:srgbClr val="1D6FC8"/>
+          </a:solidFill>
+          <a:ln>
+            <a:noFill/>
+          </a:ln>
+        </p:spPr>
+        <p:style>
+          <a:lnRef idx="1">
+            <a:schemeClr val="accent1"/>
+          </a:lnRef>
+          <a:fillRef idx="3">
+            <a:schemeClr val="accent1"/>
+          </a:fillRef>
+          <a:effectRef idx="2">
+            <a:schemeClr val="accent1"/>
+          </a:effectRef>
+          <a:fontRef idx="minor">
+            <a:schemeClr val="lt1"/>
+          </a:fontRef>
+        </p:style>
+        <p:txBody>
+          <a:bodyPr rtlCol="0" anchor="ctr"/>
+          <a:lstStyle/>
+          <a:p>
+            <a:pPr algn="ctr"/>
+          </a:p>
+        </p:txBody>
+      </p:sp>
+      <p:sp>
+        <p:nvSpPr>
+          <p:cNvPr id="3" name="TextBox 2"/>
+          <p:cNvSpPr txBox="1"/>
+          <p:nvPr/>
+        </p:nvSpPr>
+        <p:spPr>
+          <a:xfrm>
+            <a:off x="502920" y="146304"/>
+            <a:ext cx="11155680" cy="475488"/>
+          </a:xfrm>
+          <a:prstGeom prst="rect">
+            <a:avLst/>
+          </a:prstGeom>
+          <a:noFill/>
+        </p:spPr>
+        <p:txBody>
+          <a:bodyPr wrap="square">
+            <a:spAutoFit/>
+          </a:bodyPr>
+          <a:lstStyle/>
+          <a:p>
+            <a:pPr algn="l"/>
+            <a:r>
+              <a:rPr sz="2400" b="1" i="0">
+                <a:solidFill>
+                  <a:srgbClr val="1A222E"/>
+                </a:solidFill>
+              </a:rPr>
+              <a:t>補充：這份簡報是怎麼做出來的</a:t>
+            </a:r>
+          </a:p>
+        </p:txBody>
+      </p:sp>
+      <p:sp>
+        <p:nvSpPr>
+          <p:cNvPr id="4" name="TextBox 3"/>
+          <p:cNvSpPr txBox="1"/>
+          <p:nvPr/>
+        </p:nvSpPr>
+        <p:spPr>
+          <a:xfrm>
+            <a:off x="502920" y="640080"/>
+            <a:ext cx="11155680" cy="274320"/>
+          </a:xfrm>
+          <a:prstGeom prst="rect">
+            <a:avLst/>
+          </a:prstGeom>
+          <a:noFill/>
+        </p:spPr>
+        <p:txBody>
+          <a:bodyPr wrap="square">
+            <a:spAutoFit/>
+          </a:bodyPr>
+          <a:lstStyle/>
+          <a:p>
+            <a:pPr algn="l"/>
+            <a:r>
+              <a:rPr sz="1300" b="0" i="1">
+                <a:solidFill>
+                  <a:srgbClr val="55657A"/>
+                </a:solidFill>
+              </a:rPr>
+              <a:t>Claude Code 用 python-pptx 程式化生成，全程沒有打開 PowerPoint</a:t>
+            </a:r>
+          </a:p>
+        </p:txBody>
+      </p:sp>
+      <p:sp>
+        <p:nvSpPr>
+          <p:cNvPr id="5" name="Rectangle 4"/>
+          <p:cNvSpPr/>
+          <p:nvPr/>
+        </p:nvSpPr>
+        <p:spPr>
+          <a:xfrm>
+            <a:off x="457200" y="950976"/>
+            <a:ext cx="11274552" cy="41148"/>
+          </a:xfrm>
+          <a:prstGeom prst="rect">
+            <a:avLst/>
+          </a:prstGeom>
+          <a:solidFill>
+            <a:srgbClr val="E2E8F0"/>
+          </a:solidFill>
+          <a:ln>
+            <a:noFill/>
+          </a:ln>
+        </p:spPr>
+        <p:style>
+          <a:lnRef idx="1">
+            <a:schemeClr val="accent1"/>
+          </a:lnRef>
+          <a:fillRef idx="3">
+            <a:schemeClr val="accent1"/>
+          </a:fillRef>
+          <a:effectRef idx="2">
+            <a:schemeClr val="accent1"/>
+          </a:effectRef>
+          <a:fontRef idx="minor">
+            <a:schemeClr val="lt1"/>
+          </a:fontRef>
+        </p:style>
+        <p:txBody>
+          <a:bodyPr rtlCol="0" anchor="ctr"/>
+          <a:lstStyle/>
+          <a:p>
+            <a:pPr algn="ctr"/>
+          </a:p>
+        </p:txBody>
+      </p:sp>
+      <p:sp>
+        <p:nvSpPr>
+          <p:cNvPr id="6" name="TextBox 5"/>
+          <p:cNvSpPr txBox="1"/>
+          <p:nvPr/>
+        </p:nvSpPr>
+        <p:spPr>
+          <a:xfrm>
+            <a:off x="502920" y="1051560"/>
+            <a:ext cx="5486400" cy="301752"/>
+          </a:xfrm>
+          <a:prstGeom prst="rect">
+            <a:avLst/>
+          </a:prstGeom>
+          <a:noFill/>
+        </p:spPr>
+        <p:txBody>
+          <a:bodyPr wrap="square">
+            <a:spAutoFit/>
+          </a:bodyPr>
+          <a:lstStyle/>
+          <a:p>
+            <a:pPr algn="l"/>
+            <a:r>
+              <a:rPr sz="1300" b="1" i="0">
+                <a:solidFill>
+                  <a:srgbClr val="1D6FC8"/>
+                </a:solidFill>
+              </a:rPr>
+              <a:t>製作流程</a:t>
+            </a:r>
+          </a:p>
+        </p:txBody>
+      </p:sp>
+      <p:sp>
+        <p:nvSpPr>
+          <p:cNvPr id="7" name="Rectangle 6"/>
+          <p:cNvSpPr/>
+          <p:nvPr/>
+        </p:nvSpPr>
+        <p:spPr>
+          <a:xfrm>
+            <a:off x="502920" y="1389888"/>
+            <a:ext cx="11155680" cy="603504"/>
+          </a:xfrm>
+          <a:prstGeom prst="rect">
+            <a:avLst/>
+          </a:prstGeom>
+          <a:solidFill>
+            <a:srgbClr val="F8FAFC"/>
+          </a:solidFill>
+          <a:ln>
+            <a:noFill/>
+          </a:ln>
+        </p:spPr>
+        <p:style>
+          <a:lnRef idx="1">
+            <a:schemeClr val="accent1"/>
+          </a:lnRef>
+          <a:fillRef idx="3">
+            <a:schemeClr val="accent1"/>
+          </a:fillRef>
+          <a:effectRef idx="2">
+            <a:schemeClr val="accent1"/>
+          </a:effectRef>
+          <a:fontRef idx="minor">
+            <a:schemeClr val="lt1"/>
+          </a:fontRef>
+        </p:style>
+        <p:txBody>
+          <a:bodyPr rtlCol="0" anchor="ctr"/>
+          <a:lstStyle/>
+          <a:p>
+            <a:pPr algn="ctr"/>
+          </a:p>
+        </p:txBody>
+      </p:sp>
+      <p:sp>
+        <p:nvSpPr>
+          <p:cNvPr id="8" name="Rectangle 7"/>
+          <p:cNvSpPr/>
+          <p:nvPr/>
+        </p:nvSpPr>
+        <p:spPr>
+          <a:xfrm>
+            <a:off x="502920" y="1389888"/>
+            <a:ext cx="164592" cy="603504"/>
+          </a:xfrm>
+          <a:prstGeom prst="rect">
+            <a:avLst/>
+          </a:prstGeom>
+          <a:solidFill>
+            <a:srgbClr val="1D6FC8"/>
+          </a:solidFill>
+          <a:ln>
+            <a:noFill/>
+          </a:ln>
+        </p:spPr>
+        <p:style>
+          <a:lnRef idx="1">
+            <a:schemeClr val="accent1"/>
+          </a:lnRef>
+          <a:fillRef idx="3">
+            <a:schemeClr val="accent1"/>
+          </a:fillRef>
+          <a:effectRef idx="2">
+            <a:schemeClr val="accent1"/>
+          </a:effectRef>
+          <a:fontRef idx="minor">
+            <a:schemeClr val="lt1"/>
+          </a:fontRef>
+        </p:style>
+        <p:txBody>
+          <a:bodyPr rtlCol="0" anchor="ctr"/>
+          <a:lstStyle/>
+          <a:p>
+            <a:pPr algn="ctr"/>
+          </a:p>
+        </p:txBody>
+      </p:sp>
+      <p:sp>
+        <p:nvSpPr>
+          <p:cNvPr id="9" name="TextBox 8"/>
+          <p:cNvSpPr txBox="1"/>
+          <p:nvPr/>
+        </p:nvSpPr>
+        <p:spPr>
+          <a:xfrm>
+            <a:off x="777240" y="1444752"/>
+            <a:ext cx="3108960" cy="237744"/>
+          </a:xfrm>
+          <a:prstGeom prst="rect">
+            <a:avLst/>
+          </a:prstGeom>
+          <a:noFill/>
+        </p:spPr>
+        <p:txBody>
+          <a:bodyPr wrap="square">
+            <a:spAutoFit/>
+          </a:bodyPr>
+          <a:lstStyle/>
+          <a:p>
+            <a:pPr algn="l"/>
+            <a:r>
+              <a:rPr sz="1300" b="1" i="0">
+                <a:solidFill>
+                  <a:srgbClr val="1D6FC8"/>
+                </a:solidFill>
+              </a:rPr>
+              <a:t>① 使用者描述需求</a:t>
+            </a:r>
+          </a:p>
+        </p:txBody>
+      </p:sp>
+      <p:sp>
+        <p:nvSpPr>
+          <p:cNvPr id="10" name="TextBox 9"/>
+          <p:cNvSpPr txBox="1"/>
+          <p:nvPr/>
+        </p:nvSpPr>
+        <p:spPr>
+          <a:xfrm>
+            <a:off x="3977639" y="1463040"/>
+            <a:ext cx="7543800" cy="457200"/>
+          </a:xfrm>
+          <a:prstGeom prst="rect">
+            <a:avLst/>
+          </a:prstGeom>
+          <a:noFill/>
+        </p:spPr>
+        <p:txBody>
+          <a:bodyPr wrap="square">
+            <a:spAutoFit/>
+          </a:bodyPr>
+          <a:lstStyle/>
+          <a:p>
+            <a:pPr algn="l"/>
+            <a:r>
+              <a:rPr sz="1300" b="0" i="0">
+                <a:solidFill>
+                  <a:srgbClr val="1A222E"/>
+                </a:solidFill>
+              </a:rPr>
+              <a:t>用自然語言說明每張投影片的主題、內容邏輯、希望的視覺風格</a:t>
+            </a:r>
+          </a:p>
+        </p:txBody>
+      </p:sp>
+      <p:sp>
+        <p:nvSpPr>
+          <p:cNvPr id="11" name="Rectangle 10"/>
+          <p:cNvSpPr/>
+          <p:nvPr/>
+        </p:nvSpPr>
+        <p:spPr>
+          <a:xfrm>
+            <a:off x="502920" y="2029967"/>
+            <a:ext cx="11155680" cy="603504"/>
+          </a:xfrm>
+          <a:prstGeom prst="rect">
+            <a:avLst/>
+          </a:prstGeom>
+          <a:solidFill>
+            <a:srgbClr val="F8FAFC"/>
+          </a:solidFill>
+          <a:ln>
+            <a:noFill/>
+          </a:ln>
+        </p:spPr>
+        <p:style>
+          <a:lnRef idx="1">
+            <a:schemeClr val="accent1"/>
+          </a:lnRef>
+          <a:fillRef idx="3">
+            <a:schemeClr val="accent1"/>
+          </a:fillRef>
+          <a:effectRef idx="2">
+            <a:schemeClr val="accent1"/>
+          </a:effectRef>
+          <a:fontRef idx="minor">
+            <a:schemeClr val="lt1"/>
+          </a:fontRef>
+        </p:style>
+        <p:txBody>
+          <a:bodyPr rtlCol="0" anchor="ctr"/>
+          <a:lstStyle/>
+          <a:p>
+            <a:pPr algn="ctr"/>
+          </a:p>
+        </p:txBody>
+      </p:sp>
+      <p:sp>
+        <p:nvSpPr>
+          <p:cNvPr id="12" name="Rectangle 11"/>
+          <p:cNvSpPr/>
+          <p:nvPr/>
+        </p:nvSpPr>
+        <p:spPr>
+          <a:xfrm>
+            <a:off x="502920" y="2029967"/>
+            <a:ext cx="164592" cy="603504"/>
+          </a:xfrm>
+          <a:prstGeom prst="rect">
+            <a:avLst/>
+          </a:prstGeom>
+          <a:solidFill>
+            <a:srgbClr val="057A50"/>
+          </a:solidFill>
+          <a:ln>
+            <a:noFill/>
+          </a:ln>
+        </p:spPr>
+        <p:style>
+          <a:lnRef idx="1">
+            <a:schemeClr val="accent1"/>
+          </a:lnRef>
+          <a:fillRef idx="3">
+            <a:schemeClr val="accent1"/>
+          </a:fillRef>
+          <a:effectRef idx="2">
+            <a:schemeClr val="accent1"/>
+          </a:effectRef>
+          <a:fontRef idx="minor">
+            <a:schemeClr val="lt1"/>
+          </a:fontRef>
+        </p:style>
+        <p:txBody>
+          <a:bodyPr rtlCol="0" anchor="ctr"/>
+          <a:lstStyle/>
+          <a:p>
+            <a:pPr algn="ctr"/>
+          </a:p>
+        </p:txBody>
+      </p:sp>
+      <p:sp>
+        <p:nvSpPr>
+          <p:cNvPr id="13" name="TextBox 12"/>
+          <p:cNvSpPr txBox="1"/>
+          <p:nvPr/>
+        </p:nvSpPr>
+        <p:spPr>
+          <a:xfrm>
+            <a:off x="777240" y="2084831"/>
+            <a:ext cx="3108960" cy="237744"/>
+          </a:xfrm>
+          <a:prstGeom prst="rect">
+            <a:avLst/>
+          </a:prstGeom>
+          <a:noFill/>
+        </p:spPr>
+        <p:txBody>
+          <a:bodyPr wrap="square">
+            <a:spAutoFit/>
+          </a:bodyPr>
+          <a:lstStyle/>
+          <a:p>
+            <a:pPr algn="l"/>
+            <a:r>
+              <a:rPr sz="1300" b="1" i="0">
+                <a:solidFill>
+                  <a:srgbClr val="057A50"/>
+                </a:solidFill>
+              </a:rPr>
+              <a:t>② Claude Code 寫 Python 腳本</a:t>
+            </a:r>
+          </a:p>
+        </p:txBody>
+      </p:sp>
+      <p:sp>
+        <p:nvSpPr>
+          <p:cNvPr id="14" name="TextBox 13"/>
+          <p:cNvSpPr txBox="1"/>
+          <p:nvPr/>
+        </p:nvSpPr>
+        <p:spPr>
+          <a:xfrm>
+            <a:off x="3977639" y="2103120"/>
+            <a:ext cx="7543800" cy="457200"/>
+          </a:xfrm>
+          <a:prstGeom prst="rect">
+            <a:avLst/>
+          </a:prstGeom>
+          <a:noFill/>
+        </p:spPr>
+        <p:txBody>
+          <a:bodyPr wrap="square">
+            <a:spAutoFit/>
+          </a:bodyPr>
+          <a:lstStyle/>
+          <a:p>
+            <a:pPr algn="l"/>
+            <a:r>
+              <a:rPr sz="1300" b="0" i="0">
+                <a:solidFill>
+                  <a:srgbClr val="1A222E"/>
+                </a:solidFill>
+              </a:rPr>
+              <a:t>用 python-pptx 把版面、顏色、文字、矩形全部以程式碼定義；每個元素都有精確的座標與尺寸（inches）</a:t>
+            </a:r>
+          </a:p>
+        </p:txBody>
+      </p:sp>
+      <p:sp>
+        <p:nvSpPr>
+          <p:cNvPr id="15" name="Rectangle 14"/>
+          <p:cNvSpPr/>
+          <p:nvPr/>
+        </p:nvSpPr>
+        <p:spPr>
+          <a:xfrm>
+            <a:off x="502920" y="2670048"/>
+            <a:ext cx="11155680" cy="603504"/>
+          </a:xfrm>
+          <a:prstGeom prst="rect">
+            <a:avLst/>
+          </a:prstGeom>
+          <a:solidFill>
+            <a:srgbClr val="F8FAFC"/>
+          </a:solidFill>
+          <a:ln>
+            <a:noFill/>
+          </a:ln>
+        </p:spPr>
+        <p:style>
+          <a:lnRef idx="1">
+            <a:schemeClr val="accent1"/>
+          </a:lnRef>
+          <a:fillRef idx="3">
+            <a:schemeClr val="accent1"/>
+          </a:fillRef>
+          <a:effectRef idx="2">
+            <a:schemeClr val="accent1"/>
+          </a:effectRef>
+          <a:fontRef idx="minor">
+            <a:schemeClr val="lt1"/>
+          </a:fontRef>
+        </p:style>
+        <p:txBody>
+          <a:bodyPr rtlCol="0" anchor="ctr"/>
+          <a:lstStyle/>
+          <a:p>
+            <a:pPr algn="ctr"/>
+          </a:p>
+        </p:txBody>
+      </p:sp>
+      <p:sp>
+        <p:nvSpPr>
+          <p:cNvPr id="16" name="Rectangle 15"/>
+          <p:cNvSpPr/>
+          <p:nvPr/>
+        </p:nvSpPr>
+        <p:spPr>
+          <a:xfrm>
+            <a:off x="502920" y="2670048"/>
+            <a:ext cx="164592" cy="603504"/>
+          </a:xfrm>
+          <a:prstGeom prst="rect">
+            <a:avLst/>
+          </a:prstGeom>
+          <a:solidFill>
+            <a:srgbClr val="B45A00"/>
+          </a:solidFill>
+          <a:ln>
+            <a:noFill/>
+          </a:ln>
+        </p:spPr>
+        <p:style>
+          <a:lnRef idx="1">
+            <a:schemeClr val="accent1"/>
+          </a:lnRef>
+          <a:fillRef idx="3">
+            <a:schemeClr val="accent1"/>
+          </a:fillRef>
+          <a:effectRef idx="2">
+            <a:schemeClr val="accent1"/>
+          </a:effectRef>
+          <a:fontRef idx="minor">
+            <a:schemeClr val="lt1"/>
+          </a:fontRef>
+        </p:style>
+        <p:txBody>
+          <a:bodyPr rtlCol="0" anchor="ctr"/>
+          <a:lstStyle/>
+          <a:p>
+            <a:pPr algn="ctr"/>
+          </a:p>
+        </p:txBody>
+      </p:sp>
+      <p:sp>
+        <p:nvSpPr>
+          <p:cNvPr id="17" name="TextBox 16"/>
+          <p:cNvSpPr txBox="1"/>
+          <p:nvPr/>
+        </p:nvSpPr>
+        <p:spPr>
+          <a:xfrm>
+            <a:off x="777240" y="2724912"/>
+            <a:ext cx="3108960" cy="237744"/>
+          </a:xfrm>
+          <a:prstGeom prst="rect">
+            <a:avLst/>
+          </a:prstGeom>
+          <a:noFill/>
+        </p:spPr>
+        <p:txBody>
+          <a:bodyPr wrap="square">
+            <a:spAutoFit/>
+          </a:bodyPr>
+          <a:lstStyle/>
+          <a:p>
+            <a:pPr algn="l"/>
+            <a:r>
+              <a:rPr sz="1300" b="1" i="0">
+                <a:solidFill>
+                  <a:srgbClr val="B45A00"/>
+                </a:solidFill>
+              </a:rPr>
+              <a:t>③ Bash 執行，產出 .pptx</a:t>
+            </a:r>
+          </a:p>
+        </p:txBody>
+      </p:sp>
+      <p:sp>
+        <p:nvSpPr>
+          <p:cNvPr id="18" name="TextBox 17"/>
+          <p:cNvSpPr txBox="1"/>
+          <p:nvPr/>
+        </p:nvSpPr>
+        <p:spPr>
+          <a:xfrm>
+            <a:off x="3977639" y="2743200"/>
+            <a:ext cx="7543800" cy="457200"/>
+          </a:xfrm>
+          <a:prstGeom prst="rect">
+            <a:avLst/>
+          </a:prstGeom>
+          <a:noFill/>
+        </p:spPr>
+        <p:txBody>
+          <a:bodyPr wrap="square">
+            <a:spAutoFit/>
+          </a:bodyPr>
+          <a:lstStyle/>
+          <a:p>
+            <a:pPr algn="l"/>
+            <a:r>
+              <a:rPr sz="1300" b="0" i="0">
+                <a:solidFill>
+                  <a:srgbClr val="1A222E"/>
+                </a:solidFill>
+              </a:rPr>
+              <a:t>執行 make_combined_ppt.py → 直接產出 claude_code_full.pptx，不需人工在 UI 拖拉</a:t>
+            </a:r>
+          </a:p>
+        </p:txBody>
+      </p:sp>
+      <p:sp>
+        <p:nvSpPr>
+          <p:cNvPr id="19" name="Rectangle 18"/>
+          <p:cNvSpPr/>
+          <p:nvPr/>
+        </p:nvSpPr>
+        <p:spPr>
+          <a:xfrm>
+            <a:off x="502920" y="3310128"/>
+            <a:ext cx="11155680" cy="603504"/>
+          </a:xfrm>
+          <a:prstGeom prst="rect">
+            <a:avLst/>
+          </a:prstGeom>
+          <a:solidFill>
+            <a:srgbClr val="F8FAFC"/>
+          </a:solidFill>
+          <a:ln>
+            <a:noFill/>
+          </a:ln>
+        </p:spPr>
+        <p:style>
+          <a:lnRef idx="1">
+            <a:schemeClr val="accent1"/>
+          </a:lnRef>
+          <a:fillRef idx="3">
+            <a:schemeClr val="accent1"/>
+          </a:fillRef>
+          <a:effectRef idx="2">
+            <a:schemeClr val="accent1"/>
+          </a:effectRef>
+          <a:fontRef idx="minor">
+            <a:schemeClr val="lt1"/>
+          </a:fontRef>
+        </p:style>
+        <p:txBody>
+          <a:bodyPr rtlCol="0" anchor="ctr"/>
+          <a:lstStyle/>
+          <a:p>
+            <a:pPr algn="ctr"/>
+          </a:p>
+        </p:txBody>
+      </p:sp>
+      <p:sp>
+        <p:nvSpPr>
+          <p:cNvPr id="20" name="Rectangle 19"/>
+          <p:cNvSpPr/>
+          <p:nvPr/>
+        </p:nvSpPr>
+        <p:spPr>
+          <a:xfrm>
+            <a:off x="502920" y="3310128"/>
+            <a:ext cx="164592" cy="603504"/>
+          </a:xfrm>
+          <a:prstGeom prst="rect">
+            <a:avLst/>
+          </a:prstGeom>
+          <a:solidFill>
+            <a:srgbClr val="5B21B6"/>
+          </a:solidFill>
+          <a:ln>
+            <a:noFill/>
+          </a:ln>
+        </p:spPr>
+        <p:style>
+          <a:lnRef idx="1">
+            <a:schemeClr val="accent1"/>
+          </a:lnRef>
+          <a:fillRef idx="3">
+            <a:schemeClr val="accent1"/>
+          </a:fillRef>
+          <a:effectRef idx="2">
+            <a:schemeClr val="accent1"/>
+          </a:effectRef>
+          <a:fontRef idx="minor">
+            <a:schemeClr val="lt1"/>
+          </a:fontRef>
+        </p:style>
+        <p:txBody>
+          <a:bodyPr rtlCol="0" anchor="ctr"/>
+          <a:lstStyle/>
+          <a:p>
+            <a:pPr algn="ctr"/>
+          </a:p>
+        </p:txBody>
+      </p:sp>
+      <p:sp>
+        <p:nvSpPr>
+          <p:cNvPr id="21" name="TextBox 20"/>
+          <p:cNvSpPr txBox="1"/>
+          <p:nvPr/>
+        </p:nvSpPr>
+        <p:spPr>
+          <a:xfrm>
+            <a:off x="777240" y="3364992"/>
+            <a:ext cx="3108960" cy="237744"/>
+          </a:xfrm>
+          <a:prstGeom prst="rect">
+            <a:avLst/>
+          </a:prstGeom>
+          <a:noFill/>
+        </p:spPr>
+        <p:txBody>
+          <a:bodyPr wrap="square">
+            <a:spAutoFit/>
+          </a:bodyPr>
+          <a:lstStyle/>
+          <a:p>
+            <a:pPr algn="l"/>
+            <a:r>
+              <a:rPr sz="1300" b="1" i="0">
+                <a:solidFill>
+                  <a:srgbClr val="5B21B6"/>
+                </a:solidFill>
+              </a:rPr>
+              <a:t>④ 人眼確認，提供 feedback</a:t>
+            </a:r>
+          </a:p>
+        </p:txBody>
+      </p:sp>
+      <p:sp>
+        <p:nvSpPr>
+          <p:cNvPr id="22" name="TextBox 21"/>
+          <p:cNvSpPr txBox="1"/>
+          <p:nvPr/>
+        </p:nvSpPr>
+        <p:spPr>
+          <a:xfrm>
+            <a:off x="3977639" y="3383280"/>
+            <a:ext cx="7543800" cy="457200"/>
+          </a:xfrm>
+          <a:prstGeom prst="rect">
+            <a:avLst/>
+          </a:prstGeom>
+          <a:noFill/>
+        </p:spPr>
+        <p:txBody>
+          <a:bodyPr wrap="square">
+            <a:spAutoFit/>
+          </a:bodyPr>
+          <a:lstStyle/>
+          <a:p>
+            <a:pPr algn="l"/>
+            <a:r>
+              <a:rPr sz="1300" b="0" i="0">
+                <a:solidFill>
+                  <a:srgbClr val="1A222E"/>
+                </a:solidFill>
+              </a:rPr>
+              <a:t>開啟 .pptx 看版面效果 → 文字截斷、超出邊界、顏色不對 → 回報給 Claude Code 修正</a:t>
+            </a:r>
+          </a:p>
+        </p:txBody>
+      </p:sp>
+      <p:sp>
+        <p:nvSpPr>
+          <p:cNvPr id="23" name="Rectangle 22"/>
+          <p:cNvSpPr/>
+          <p:nvPr/>
+        </p:nvSpPr>
+        <p:spPr>
+          <a:xfrm>
+            <a:off x="502920" y="3950208"/>
+            <a:ext cx="11155680" cy="603504"/>
+          </a:xfrm>
+          <a:prstGeom prst="rect">
+            <a:avLst/>
+          </a:prstGeom>
+          <a:solidFill>
+            <a:srgbClr val="F8FAFC"/>
+          </a:solidFill>
+          <a:ln>
+            <a:noFill/>
+          </a:ln>
+        </p:spPr>
+        <p:style>
+          <a:lnRef idx="1">
+            <a:schemeClr val="accent1"/>
+          </a:lnRef>
+          <a:fillRef idx="3">
+            <a:schemeClr val="accent1"/>
+          </a:fillRef>
+          <a:effectRef idx="2">
+            <a:schemeClr val="accent1"/>
+          </a:effectRef>
+          <a:fontRef idx="minor">
+            <a:schemeClr val="lt1"/>
+          </a:fontRef>
+        </p:style>
+        <p:txBody>
+          <a:bodyPr rtlCol="0" anchor="ctr"/>
+          <a:lstStyle/>
+          <a:p>
+            <a:pPr algn="ctr"/>
+          </a:p>
+        </p:txBody>
+      </p:sp>
+      <p:sp>
+        <p:nvSpPr>
+          <p:cNvPr id="24" name="Rectangle 23"/>
+          <p:cNvSpPr/>
+          <p:nvPr/>
+        </p:nvSpPr>
+        <p:spPr>
+          <a:xfrm>
+            <a:off x="502920" y="3950208"/>
+            <a:ext cx="164592" cy="603504"/>
+          </a:xfrm>
+          <a:prstGeom prst="rect">
+            <a:avLst/>
+          </a:prstGeom>
+          <a:solidFill>
+            <a:srgbClr val="55657A"/>
+          </a:solidFill>
+          <a:ln>
+            <a:noFill/>
+          </a:ln>
+        </p:spPr>
+        <p:style>
+          <a:lnRef idx="1">
+            <a:schemeClr val="accent1"/>
+          </a:lnRef>
+          <a:fillRef idx="3">
+            <a:schemeClr val="accent1"/>
+          </a:fillRef>
+          <a:effectRef idx="2">
+            <a:schemeClr val="accent1"/>
+          </a:effectRef>
+          <a:fontRef idx="minor">
+            <a:schemeClr val="lt1"/>
+          </a:fontRef>
+        </p:style>
+        <p:txBody>
+          <a:bodyPr rtlCol="0" anchor="ctr"/>
+          <a:lstStyle/>
+          <a:p>
+            <a:pPr algn="ctr"/>
+          </a:p>
+        </p:txBody>
+      </p:sp>
+      <p:sp>
+        <p:nvSpPr>
+          <p:cNvPr id="25" name="TextBox 24"/>
+          <p:cNvSpPr txBox="1"/>
+          <p:nvPr/>
+        </p:nvSpPr>
+        <p:spPr>
+          <a:xfrm>
+            <a:off x="777240" y="4005072"/>
+            <a:ext cx="3108960" cy="237744"/>
+          </a:xfrm>
+          <a:prstGeom prst="rect">
+            <a:avLst/>
+          </a:prstGeom>
+          <a:noFill/>
+        </p:spPr>
+        <p:txBody>
+          <a:bodyPr wrap="square">
+            <a:spAutoFit/>
+          </a:bodyPr>
+          <a:lstStyle/>
+          <a:p>
+            <a:pPr algn="l"/>
+            <a:r>
+              <a:rPr sz="1300" b="1" i="0">
+                <a:solidFill>
+                  <a:srgbClr val="55657A"/>
+                </a:solidFill>
+              </a:rPr>
+              <a:t>⑤ Edit 精確修改，重新執行</a:t>
+            </a:r>
+          </a:p>
+        </p:txBody>
+      </p:sp>
+      <p:sp>
+        <p:nvSpPr>
+          <p:cNvPr id="26" name="TextBox 25"/>
+          <p:cNvSpPr txBox="1"/>
+          <p:nvPr/>
+        </p:nvSpPr>
+        <p:spPr>
+          <a:xfrm>
+            <a:off x="3977639" y="4023360"/>
+            <a:ext cx="7543800" cy="457200"/>
+          </a:xfrm>
+          <a:prstGeom prst="rect">
+            <a:avLst/>
+          </a:prstGeom>
+          <a:noFill/>
+        </p:spPr>
+        <p:txBody>
+          <a:bodyPr wrap="square">
+            <a:spAutoFit/>
+          </a:bodyPr>
+          <a:lstStyle/>
+          <a:p>
+            <a:pPr algn="l"/>
+            <a:r>
+              <a:rPr sz="1300" b="0" i="0">
+                <a:solidFill>
+                  <a:srgbClr val="1A222E"/>
+                </a:solidFill>
+              </a:rPr>
+              <a:t>Claude Code 用 Edit tool 改腳本中的具體數值 → 重新執行 → 迭代直到滿意</a:t>
+            </a:r>
+          </a:p>
+        </p:txBody>
+      </p:sp>
+      <p:sp>
+        <p:nvSpPr>
+          <p:cNvPr id="27" name="Rectangle 26"/>
+          <p:cNvSpPr/>
+          <p:nvPr/>
+        </p:nvSpPr>
+        <p:spPr>
+          <a:xfrm>
+            <a:off x="457200" y="4681728"/>
+            <a:ext cx="11274552" cy="41148"/>
+          </a:xfrm>
+          <a:prstGeom prst="rect">
+            <a:avLst/>
+          </a:prstGeom>
+          <a:solidFill>
+            <a:srgbClr val="E2E8F0"/>
+          </a:solidFill>
+          <a:ln>
+            <a:noFill/>
+          </a:ln>
+        </p:spPr>
+        <p:style>
+          <a:lnRef idx="1">
+            <a:schemeClr val="accent1"/>
+          </a:lnRef>
+          <a:fillRef idx="3">
+            <a:schemeClr val="accent1"/>
+          </a:fillRef>
+          <a:effectRef idx="2">
+            <a:schemeClr val="accent1"/>
+          </a:effectRef>
+          <a:fontRef idx="minor">
+            <a:schemeClr val="lt1"/>
+          </a:fontRef>
+        </p:style>
+        <p:txBody>
+          <a:bodyPr rtlCol="0" anchor="ctr"/>
+          <a:lstStyle/>
+          <a:p>
+            <a:pPr algn="ctr"/>
+          </a:p>
+        </p:txBody>
+      </p:sp>
+      <p:sp>
+        <p:nvSpPr>
+          <p:cNvPr id="28" name="TextBox 27"/>
+          <p:cNvSpPr txBox="1"/>
+          <p:nvPr/>
+        </p:nvSpPr>
+        <p:spPr>
+          <a:xfrm>
+            <a:off x="502920" y="4773168"/>
+            <a:ext cx="5486400" cy="301752"/>
+          </a:xfrm>
+          <a:prstGeom prst="rect">
+            <a:avLst/>
+          </a:prstGeom>
+          <a:noFill/>
+        </p:spPr>
+        <p:txBody>
+          <a:bodyPr wrap="square">
+            <a:spAutoFit/>
+          </a:bodyPr>
+          <a:lstStyle/>
+          <a:p>
+            <a:pPr algn="l"/>
+            <a:r>
+              <a:rPr sz="1300" b="1" i="0">
+                <a:solidFill>
+                  <a:srgbClr val="1D6FC8"/>
+                </a:solidFill>
+              </a:rPr>
+              <a:t>為什麼用程式碼，不直接用 POWERPOINT？</a:t>
+            </a:r>
+          </a:p>
+        </p:txBody>
+      </p:sp>
+      <p:sp>
+        <p:nvSpPr>
+          <p:cNvPr id="29" name="TextBox 28"/>
+          <p:cNvSpPr txBox="1"/>
+          <p:nvPr/>
+        </p:nvSpPr>
+        <p:spPr>
+          <a:xfrm>
+            <a:off x="502920" y="5120640"/>
+            <a:ext cx="11155680" cy="384048"/>
+          </a:xfrm>
+          <a:prstGeom prst="rect">
+            <a:avLst/>
+          </a:prstGeom>
+          <a:noFill/>
+        </p:spPr>
+        <p:txBody>
+          <a:bodyPr wrap="square">
+            <a:spAutoFit/>
+          </a:bodyPr>
+          <a:lstStyle/>
+          <a:p>
+            <a:pPr algn="l"/>
+            <a:r>
+              <a:rPr sz="1400" b="0" i="0">
+                <a:solidFill>
+                  <a:srgbClr val="1A222E"/>
+                </a:solidFill>
+              </a:rPr>
+              <a:t>• 版本控制：每次修改都是 git diff，可隨時還原任何版本</a:t>
+            </a:r>
+          </a:p>
+        </p:txBody>
+      </p:sp>
+      <p:sp>
+        <p:nvSpPr>
+          <p:cNvPr id="30" name="TextBox 29"/>
+          <p:cNvSpPr txBox="1"/>
+          <p:nvPr/>
+        </p:nvSpPr>
+        <p:spPr>
+          <a:xfrm>
+            <a:off x="502920" y="5504688"/>
+            <a:ext cx="11155680" cy="384048"/>
+          </a:xfrm>
+          <a:prstGeom prst="rect">
+            <a:avLst/>
+          </a:prstGeom>
+          <a:noFill/>
+        </p:spPr>
+        <p:txBody>
+          <a:bodyPr wrap="square">
+            <a:spAutoFit/>
+          </a:bodyPr>
+          <a:lstStyle/>
+          <a:p>
+            <a:pPr algn="l"/>
+            <a:r>
+              <a:rPr sz="1400" b="0" i="0">
+                <a:solidFill>
+                  <a:srgbClr val="1A222E"/>
+                </a:solidFill>
+              </a:rPr>
+              <a:t>• 批量一致：改一個顏色常數或 helper 函式，所有投影片同步更新</a:t>
+            </a:r>
+          </a:p>
+        </p:txBody>
+      </p:sp>
+      <p:sp>
+        <p:nvSpPr>
+          <p:cNvPr id="31" name="TextBox 30"/>
+          <p:cNvSpPr txBox="1"/>
+          <p:nvPr/>
+        </p:nvSpPr>
+        <p:spPr>
+          <a:xfrm>
+            <a:off x="502920" y="5888736"/>
+            <a:ext cx="11155680" cy="384048"/>
+          </a:xfrm>
+          <a:prstGeom prst="rect">
+            <a:avLst/>
+          </a:prstGeom>
+          <a:noFill/>
+        </p:spPr>
+        <p:txBody>
+          <a:bodyPr wrap="square">
+            <a:spAutoFit/>
+          </a:bodyPr>
+          <a:lstStyle/>
+          <a:p>
+            <a:pPr algn="l"/>
+            <a:r>
+              <a:rPr sz="1400" b="0" i="0">
+                <a:solidFill>
+                  <a:srgbClr val="1A222E"/>
+                </a:solidFill>
+              </a:rPr>
+              <a:t>• 精確定位：座標以 inches 指定，不會因手滑拖錯；文字框大小可計算不超出邊界</a:t>
+            </a:r>
+          </a:p>
+        </p:txBody>
+      </p:sp>
+      <p:sp>
+        <p:nvSpPr>
+          <p:cNvPr id="32" name="TextBox 31"/>
+          <p:cNvSpPr txBox="1"/>
+          <p:nvPr/>
+        </p:nvSpPr>
+        <p:spPr>
+          <a:xfrm>
+            <a:off x="502920" y="6272784"/>
+            <a:ext cx="11155680" cy="384048"/>
+          </a:xfrm>
+          <a:prstGeom prst="rect">
+            <a:avLst/>
+          </a:prstGeom>
+          <a:noFill/>
+        </p:spPr>
+        <p:txBody>
+          <a:bodyPr wrap="square">
+            <a:spAutoFit/>
+          </a:bodyPr>
+          <a:lstStyle/>
+          <a:p>
+            <a:pPr algn="l"/>
+            <a:r>
+              <a:rPr sz="1400" b="0" i="0">
+                <a:solidFill>
+                  <a:srgbClr val="1A222E"/>
+                </a:solidFill>
+              </a:rPr>
+              <a:t>• 可審查：整份 PPT 的邏輯都在 900 行 Python 裡，Claude Code 可直接讀懂並修改</a:t>
+            </a:r>
           </a:p>
         </p:txBody>
       </p:sp>

--- a/claude_code_full.pptx
+++ b/claude_code_full.pptx
@@ -29,6 +29,7 @@
     <p:sldId id="277" r:id="rId28"/>
     <p:sldId id="278" r:id="rId29"/>
     <p:sldId id="279" r:id="rId30"/>
+    <p:sldId id="280" r:id="rId31"/>
   </p:sldIdLst>
   <p:sldSz cx="12188952" cy="6858000" type="screen4x3"/>
   <p:notesSz cx="6858000" cy="9144000"/>
@@ -23607,7 +23608,7 @@
                   <a:srgbClr val="1D6FC8"/>
                 </a:solidFill>
               </a:rPr>
-              <a:t>Agentic Loop</a:t>
+              <a:t>不是工具包，是系統</a:t>
             </a:r>
           </a:p>
         </p:txBody>
@@ -23641,7 +23642,7 @@
                   <a:srgbClr val="1A222E"/>
                 </a:solidFill>
               </a:rPr>
-              <a:t>批次 tool call 平行執行，不含 tool_use 才停止。Subagent 有獨立 loop，不佔主 agent 的推理次數。</a:t>
+              <a:t>四個 Reason 互相依賴：Tools 讓 Loop 落地，Loop 讓 Context 有意義，Context 讓長任務品質撐住，Model 決定每一步推理上限。缺一個，系統降級。</a:t>
             </a:r>
           </a:p>
         </p:txBody>
@@ -23718,7 +23719,7 @@
                   <a:srgbClr val="057A50"/>
                 </a:solidFill>
               </a:rPr>
-              <a:t>工具設計哲學</a:t>
+              <a:t>Loop 的底層就是 ReAct</a:t>
             </a:r>
           </a:p>
         </p:txBody>
@@ -23752,7 +23753,7 @@
                   <a:srgbClr val="1A222E"/>
                 </a:solidFill>
               </a:rPr>
-              <a:t>讀取工具預載且 auto-allow → 零中斷探索。Edit 只傳 diff → token 最少。每個工具針對最少確認次數最佳化。</a:t>
+              <a:t>每一步 = Reason → tool_use → tool_result，批次平行發出，不含 tool_use 才終止。Subagent 有獨立 loop，context 不互污。</a:t>
             </a:r>
           </a:p>
         </p:txBody>
@@ -23829,7 +23830,7 @@
                   <a:srgbClr val="B45A00"/>
                 </a:solidFill>
               </a:rPr>
-              <a:t>Pre-loaded vs Deferred</a:t>
+              <a:t>工具設計原則：保護 loop 流暢度</a:t>
             </a:r>
           </a:p>
         </p:txBody>
@@ -23863,7 +23864,7 @@
                   <a:srgbClr val="1A222E"/>
                 </a:solidFill>
               </a:rPr>
-              <a:t>9 個預載（零延遲）vs 17 個延遲載入（省 token，透過 ToolSearch，+2-3 秒）。根據使用頻率權衡 latency 與 token budget。</a:t>
+              <a:t>唯讀工具 auto-allow + 預載 → 探索零中斷。Edit 只傳 diff → token 最省。每個設計決策都在降低確認摩擦。</a:t>
             </a:r>
           </a:p>
         </p:txBody>
@@ -23940,7 +23941,7 @@
                   <a:srgbClr val="5B21B6"/>
                 </a:solidFill>
               </a:rPr>
-              <a:t>Skill &amp; Agent 的隔離差異</a:t>
+              <a:t>隔離有兩種強度，用途不同</a:t>
             </a:r>
           </a:p>
         </p:txBody>
@@ -23974,7 +23975,7 @@
                   <a:srgbClr val="1A222E"/>
                 </a:solidFill>
               </a:rPr>
-              <a:t>Skill allowed-tools 是軟性（context 共享）。Agent tools 是硬性 API 層隔離（LLM 根本看不到其他工具 schema）。</a:t>
+              <a:t>Skill allowed-tools = 軟性（LLM 仍可呼叫其他工具）。Agent tools = 硬性 API 層隔離（LLM 根本看不到白名單以外的 schema）。不能互換。</a:t>
             </a:r>
           </a:p>
         </p:txBody>
@@ -24051,7 +24052,7 @@
                   <a:srgbClr val="AA1818"/>
                 </a:solidFill>
               </a:rPr>
-              <a:t>Permission 安全設計</a:t>
+              <a:t>Permission 有兩層，只有一層能設定</a:t>
             </a:r>
           </a:p>
         </p:txBody>
@@ -24085,7 +24086,7 @@
                   <a:srgbClr val="1A222E"/>
                 </a:solidFill>
               </a:rPr>
-              <a:t>複合命令永遠不匹配 prefix 規則（binary 逆向確認）。Layer 2 判斷性確認無法用設定關閉。</a:t>
+              <a:t>Framework 規則（auto-allow / Plan Mode / settings.json）可設定。Claude 的訓練習慣（發現非預期狀態就暫停確認）無法透過任何設定改變，因為改的是 framework，不是 model。</a:t>
             </a:r>
           </a:p>
         </p:txBody>
@@ -24159,10 +24160,10 @@
             <a:r>
               <a:rPr sz="1700" b="1" i="0">
                 <a:solidFill>
-                  <a:srgbClr val="55657A"/>
-                </a:solidFill>
-              </a:rPr>
-              <a:t>Strong Model 貫穿始終</a:t>
+                  <a:srgbClr val="0E7A8E"/>
+                </a:solidFill>
+              </a:rPr>
+              <a:t>各環節良率決定整體成功率</a:t>
             </a:r>
           </a:p>
         </p:txBody>
@@ -24196,7 +24197,7 @@
                   <a:srgbClr val="1A222E"/>
                 </a:solidFill>
               </a:rPr>
-              <a:t>前面每一個機制能正確運作，背後都是 model 在每一步做出正確判斷。工具再多，model 推理錯誤，整個系統就跑偏。</a:t>
+              <a:t>Agentic loop 的成功率是各環節的乘積：理解需求、選對工具、解讀結果、判斷下一步，每一步都必須正確。就像晶圓製造，單步良率的微小差距，在數十輪迭代後會被放大成巨大的整體差距。這也是 Strong Model 為何如此關鍵。</a:t>
             </a:r>
           </a:p>
         </p:txBody>
@@ -24210,6 +24211,117 @@
         <p:spPr>
           <a:xfrm>
             <a:off x="457200" y="5669280"/>
+            <a:ext cx="11274552" cy="41148"/>
+          </a:xfrm>
+          <a:prstGeom prst="rect">
+            <a:avLst/>
+          </a:prstGeom>
+          <a:solidFill>
+            <a:srgbClr val="E2E8F0"/>
+          </a:solidFill>
+          <a:ln>
+            <a:noFill/>
+          </a:ln>
+        </p:spPr>
+        <p:style>
+          <a:lnRef idx="1">
+            <a:schemeClr val="accent1"/>
+          </a:lnRef>
+          <a:fillRef idx="3">
+            <a:schemeClr val="accent1"/>
+          </a:fillRef>
+          <a:effectRef idx="2">
+            <a:schemeClr val="accent1"/>
+          </a:effectRef>
+          <a:fontRef idx="minor">
+            <a:schemeClr val="lt1"/>
+          </a:fontRef>
+        </p:style>
+        <p:txBody>
+          <a:bodyPr rtlCol="0" anchor="ctr"/>
+          <a:lstStyle/>
+          <a:p>
+            <a:pPr algn="ctr"/>
+          </a:p>
+        </p:txBody>
+      </p:sp>
+      <p:sp>
+        <p:nvSpPr>
+          <p:cNvPr id="24" name="TextBox 23"/>
+          <p:cNvSpPr txBox="1"/>
+          <p:nvPr/>
+        </p:nvSpPr>
+        <p:spPr>
+          <a:xfrm>
+            <a:off x="502920" y="5760720"/>
+            <a:ext cx="2377440" cy="438912"/>
+          </a:xfrm>
+          <a:prstGeom prst="rect">
+            <a:avLst/>
+          </a:prstGeom>
+          <a:noFill/>
+        </p:spPr>
+        <p:txBody>
+          <a:bodyPr wrap="square">
+            <a:spAutoFit/>
+          </a:bodyPr>
+          <a:lstStyle/>
+          <a:p>
+            <a:pPr algn="l"/>
+            <a:r>
+              <a:rPr sz="1700" b="1" i="0">
+                <a:solidFill>
+                  <a:srgbClr val="55657A"/>
+                </a:solidFill>
+              </a:rPr>
+              <a:t>行為要靠 JSONL 驗證</a:t>
+            </a:r>
+          </a:p>
+        </p:txBody>
+      </p:sp>
+      <p:sp>
+        <p:nvSpPr>
+          <p:cNvPr id="25" name="TextBox 24"/>
+          <p:cNvSpPr txBox="1"/>
+          <p:nvPr/>
+        </p:nvSpPr>
+        <p:spPr>
+          <a:xfrm>
+            <a:off x="2971800" y="5760720"/>
+            <a:ext cx="8732520" cy="502920"/>
+          </a:xfrm>
+          <a:prstGeom prst="rect">
+            <a:avLst/>
+          </a:prstGeom>
+          <a:noFill/>
+        </p:spPr>
+        <p:txBody>
+          <a:bodyPr wrap="square">
+            <a:spAutoFit/>
+          </a:bodyPr>
+          <a:lstStyle/>
+          <a:p>
+            <a:pPr algn="l"/>
+            <a:r>
+              <a:rPr sz="1600" b="0" i="0">
+                <a:solidFill>
+                  <a:srgbClr val="1A222E"/>
+                </a:solidFill>
+              </a:rPr>
+              <a:t>文件說設計意圖，JSONL 說實際行為。本簡報所有機制描述都以 session JSONL 交叉驗證，兩者有時不同，以 JSONL 為準。</a:t>
+            </a:r>
+          </a:p>
+        </p:txBody>
+      </p:sp>
+      <p:sp>
+        <p:nvSpPr>
+          <p:cNvPr id="26" name="Rectangle 25"/>
+          <p:cNvSpPr/>
+          <p:nvPr/>
+        </p:nvSpPr>
+        <p:spPr>
+          <a:xfrm>
+            <a:off x="457200" y="6419088"/>
             <a:ext cx="11274552" cy="41148"/>
           </a:xfrm>
           <a:prstGeom prst="rect">
@@ -24253,6 +24365,809 @@
 </file>
 
 <file path=ppt/slides/slide24.xml><?xml version="1.0" encoding="utf-8"?>
+<p:sld xmlns:a="http://schemas.openxmlformats.org/drawingml/2006/main" xmlns:p="http://schemas.openxmlformats.org/presentationml/2006/main" xmlns:r="http://schemas.openxmlformats.org/officeDocument/2006/relationships">
+  <p:cSld>
+    <p:bg>
+      <p:bgPr>
+        <a:solidFill>
+          <a:srgbClr val="FFFFFF"/>
+        </a:solidFill>
+        <a:effectLst/>
+      </p:bgPr>
+    </p:bg>
+    <p:spTree>
+      <p:nvGrpSpPr>
+        <p:cNvPr id="1" name=""/>
+        <p:cNvGrpSpPr/>
+        <p:nvPr/>
+      </p:nvGrpSpPr>
+      <p:grpSpPr/>
+      <p:sp>
+        <p:nvSpPr>
+          <p:cNvPr id="2" name="Rectangle 1"/>
+          <p:cNvSpPr/>
+          <p:nvPr/>
+        </p:nvSpPr>
+        <p:spPr>
+          <a:xfrm>
+            <a:off x="0" y="0"/>
+            <a:ext cx="12188952" cy="91440"/>
+          </a:xfrm>
+          <a:prstGeom prst="rect">
+            <a:avLst/>
+          </a:prstGeom>
+          <a:solidFill>
+            <a:srgbClr val="1D6FC8"/>
+          </a:solidFill>
+          <a:ln>
+            <a:noFill/>
+          </a:ln>
+        </p:spPr>
+        <p:style>
+          <a:lnRef idx="1">
+            <a:schemeClr val="accent1"/>
+          </a:lnRef>
+          <a:fillRef idx="3">
+            <a:schemeClr val="accent1"/>
+          </a:fillRef>
+          <a:effectRef idx="2">
+            <a:schemeClr val="accent1"/>
+          </a:effectRef>
+          <a:fontRef idx="minor">
+            <a:schemeClr val="lt1"/>
+          </a:fontRef>
+        </p:style>
+        <p:txBody>
+          <a:bodyPr rtlCol="0" anchor="ctr"/>
+          <a:lstStyle/>
+          <a:p>
+            <a:pPr algn="ctr"/>
+          </a:p>
+        </p:txBody>
+      </p:sp>
+      <p:sp>
+        <p:nvSpPr>
+          <p:cNvPr id="3" name="TextBox 2"/>
+          <p:cNvSpPr txBox="1"/>
+          <p:nvPr/>
+        </p:nvSpPr>
+        <p:spPr>
+          <a:xfrm>
+            <a:off x="502920" y="146304"/>
+            <a:ext cx="11155680" cy="475488"/>
+          </a:xfrm>
+          <a:prstGeom prst="rect">
+            <a:avLst/>
+          </a:prstGeom>
+          <a:noFill/>
+        </p:spPr>
+        <p:txBody>
+          <a:bodyPr wrap="square">
+            <a:spAutoFit/>
+          </a:bodyPr>
+          <a:lstStyle/>
+          <a:p>
+            <a:pPr algn="l"/>
+            <a:r>
+              <a:rPr sz="2400" b="1" i="0">
+                <a:solidFill>
+                  <a:srgbClr val="1A222E"/>
+                </a:solidFill>
+              </a:rPr>
+              <a:t>補充：使用 Code Agent 最大的陷阱</a:t>
+            </a:r>
+          </a:p>
+        </p:txBody>
+      </p:sp>
+      <p:sp>
+        <p:nvSpPr>
+          <p:cNvPr id="4" name="TextBox 3"/>
+          <p:cNvSpPr txBox="1"/>
+          <p:nvPr/>
+        </p:nvSpPr>
+        <p:spPr>
+          <a:xfrm>
+            <a:off x="502920" y="640080"/>
+            <a:ext cx="11155680" cy="274320"/>
+          </a:xfrm>
+          <a:prstGeom prst="rect">
+            <a:avLst/>
+          </a:prstGeom>
+          <a:noFill/>
+        </p:spPr>
+        <p:txBody>
+          <a:bodyPr wrap="square">
+            <a:spAutoFit/>
+          </a:bodyPr>
+          <a:lstStyle/>
+          <a:p>
+            <a:pPr algn="l"/>
+            <a:r>
+              <a:rPr sz="1300" b="0" i="1">
+                <a:solidFill>
+                  <a:srgbClr val="55657A"/>
+                </a:solidFill>
+              </a:rPr>
+              <a:t>當溝通 + 修正 + 審查的成本 &gt; 自己寫的成本，用 Agent 反而更慢</a:t>
+            </a:r>
+          </a:p>
+        </p:txBody>
+      </p:sp>
+      <p:sp>
+        <p:nvSpPr>
+          <p:cNvPr id="5" name="Rectangle 4"/>
+          <p:cNvSpPr/>
+          <p:nvPr/>
+        </p:nvSpPr>
+        <p:spPr>
+          <a:xfrm>
+            <a:off x="457200" y="950976"/>
+            <a:ext cx="11274552" cy="41148"/>
+          </a:xfrm>
+          <a:prstGeom prst="rect">
+            <a:avLst/>
+          </a:prstGeom>
+          <a:solidFill>
+            <a:srgbClr val="E2E8F0"/>
+          </a:solidFill>
+          <a:ln>
+            <a:noFill/>
+          </a:ln>
+        </p:spPr>
+        <p:style>
+          <a:lnRef idx="1">
+            <a:schemeClr val="accent1"/>
+          </a:lnRef>
+          <a:fillRef idx="3">
+            <a:schemeClr val="accent1"/>
+          </a:fillRef>
+          <a:effectRef idx="2">
+            <a:schemeClr val="accent1"/>
+          </a:effectRef>
+          <a:fontRef idx="minor">
+            <a:schemeClr val="lt1"/>
+          </a:fontRef>
+        </p:style>
+        <p:txBody>
+          <a:bodyPr rtlCol="0" anchor="ctr"/>
+          <a:lstStyle/>
+          <a:p>
+            <a:pPr algn="ctr"/>
+          </a:p>
+        </p:txBody>
+      </p:sp>
+      <p:sp>
+        <p:nvSpPr>
+          <p:cNvPr id="6" name="Rectangle 5"/>
+          <p:cNvSpPr/>
+          <p:nvPr/>
+        </p:nvSpPr>
+        <p:spPr>
+          <a:xfrm>
+            <a:off x="457200" y="1051560"/>
+            <a:ext cx="11274552" cy="475488"/>
+          </a:xfrm>
+          <a:prstGeom prst="rect">
+            <a:avLst/>
+          </a:prstGeom>
+          <a:solidFill>
+            <a:srgbClr val="AA1818"/>
+          </a:solidFill>
+          <a:ln>
+            <a:noFill/>
+          </a:ln>
+        </p:spPr>
+        <p:style>
+          <a:lnRef idx="1">
+            <a:schemeClr val="accent1"/>
+          </a:lnRef>
+          <a:fillRef idx="3">
+            <a:schemeClr val="accent1"/>
+          </a:fillRef>
+          <a:effectRef idx="2">
+            <a:schemeClr val="accent1"/>
+          </a:effectRef>
+          <a:fontRef idx="minor">
+            <a:schemeClr val="lt1"/>
+          </a:fontRef>
+        </p:style>
+        <p:txBody>
+          <a:bodyPr rtlCol="0" anchor="ctr"/>
+          <a:lstStyle/>
+          <a:p>
+            <a:pPr algn="ctr"/>
+          </a:p>
+        </p:txBody>
+      </p:sp>
+      <p:sp>
+        <p:nvSpPr>
+          <p:cNvPr id="7" name="TextBox 6"/>
+          <p:cNvSpPr txBox="1"/>
+          <p:nvPr/>
+        </p:nvSpPr>
+        <p:spPr>
+          <a:xfrm>
+            <a:off x="621792" y="1115568"/>
+            <a:ext cx="10972800" cy="329184"/>
+          </a:xfrm>
+          <a:prstGeom prst="rect">
+            <a:avLst/>
+          </a:prstGeom>
+          <a:noFill/>
+        </p:spPr>
+        <p:txBody>
+          <a:bodyPr wrap="square">
+            <a:spAutoFit/>
+          </a:bodyPr>
+          <a:lstStyle/>
+          <a:p>
+            <a:pPr algn="l"/>
+            <a:r>
+              <a:rPr sz="1600" b="1" i="0">
+                <a:solidFill>
+                  <a:srgbClr val="FFFFFF"/>
+                </a:solidFill>
+              </a:rPr>
+              <a:t>溝通成本 &gt; 實作成本  →  用 Agent 反而比自己寫更花時間</a:t>
+            </a:r>
+          </a:p>
+        </p:txBody>
+      </p:sp>
+      <p:sp>
+        <p:nvSpPr>
+          <p:cNvPr id="8" name="Rectangle 7"/>
+          <p:cNvSpPr/>
+          <p:nvPr/>
+        </p:nvSpPr>
+        <p:spPr>
+          <a:xfrm>
+            <a:off x="457200" y="1600200"/>
+            <a:ext cx="5394960" cy="310896"/>
+          </a:xfrm>
+          <a:prstGeom prst="rect">
+            <a:avLst/>
+          </a:prstGeom>
+          <a:solidFill>
+            <a:srgbClr val="B45A00"/>
+          </a:solidFill>
+          <a:ln>
+            <a:noFill/>
+          </a:ln>
+        </p:spPr>
+        <p:style>
+          <a:lnRef idx="1">
+            <a:schemeClr val="accent1"/>
+          </a:lnRef>
+          <a:fillRef idx="3">
+            <a:schemeClr val="accent1"/>
+          </a:fillRef>
+          <a:effectRef idx="2">
+            <a:schemeClr val="accent1"/>
+          </a:effectRef>
+          <a:fontRef idx="minor">
+            <a:schemeClr val="lt1"/>
+          </a:fontRef>
+        </p:style>
+        <p:txBody>
+          <a:bodyPr rtlCol="0" anchor="ctr"/>
+          <a:lstStyle/>
+          <a:p>
+            <a:pPr algn="ctr"/>
+          </a:p>
+        </p:txBody>
+      </p:sp>
+      <p:sp>
+        <p:nvSpPr>
+          <p:cNvPr id="9" name="TextBox 8"/>
+          <p:cNvSpPr txBox="1"/>
+          <p:nvPr/>
+        </p:nvSpPr>
+        <p:spPr>
+          <a:xfrm>
+            <a:off x="594360" y="1627632"/>
+            <a:ext cx="5120640" cy="237744"/>
+          </a:xfrm>
+          <a:prstGeom prst="rect">
+            <a:avLst/>
+          </a:prstGeom>
+          <a:noFill/>
+        </p:spPr>
+        <p:txBody>
+          <a:bodyPr wrap="square">
+            <a:spAutoFit/>
+          </a:bodyPr>
+          <a:lstStyle/>
+          <a:p>
+            <a:pPr algn="l"/>
+            <a:r>
+              <a:rPr sz="1300" b="1" i="0">
+                <a:solidFill>
+                  <a:srgbClr val="FFFFFF"/>
+                </a:solidFill>
+              </a:rPr>
+              <a:t>什麼時候容易踩到</a:t>
+            </a:r>
+          </a:p>
+        </p:txBody>
+      </p:sp>
+      <p:sp>
+        <p:nvSpPr>
+          <p:cNvPr id="10" name="TextBox 9"/>
+          <p:cNvSpPr txBox="1"/>
+          <p:nvPr/>
+        </p:nvSpPr>
+        <p:spPr>
+          <a:xfrm>
+            <a:off x="594360" y="1938528"/>
+            <a:ext cx="5166360" cy="384048"/>
+          </a:xfrm>
+          <a:prstGeom prst="rect">
+            <a:avLst/>
+          </a:prstGeom>
+          <a:noFill/>
+        </p:spPr>
+        <p:txBody>
+          <a:bodyPr wrap="square">
+            <a:spAutoFit/>
+          </a:bodyPr>
+          <a:lstStyle/>
+          <a:p>
+            <a:pPr algn="l"/>
+            <a:r>
+              <a:rPr sz="1300" b="0" i="0">
+                <a:solidFill>
+                  <a:srgbClr val="1A222E"/>
+                </a:solidFill>
+              </a:rPr>
+              <a:t>• 任務邊界模糊：Agent 猜錯方向，做完才發現不是你要的</a:t>
+            </a:r>
+          </a:p>
+        </p:txBody>
+      </p:sp>
+      <p:sp>
+        <p:nvSpPr>
+          <p:cNvPr id="11" name="TextBox 10"/>
+          <p:cNvSpPr txBox="1"/>
+          <p:nvPr/>
+        </p:nvSpPr>
+        <p:spPr>
+          <a:xfrm>
+            <a:off x="594360" y="2340864"/>
+            <a:ext cx="5166360" cy="384048"/>
+          </a:xfrm>
+          <a:prstGeom prst="rect">
+            <a:avLst/>
+          </a:prstGeom>
+          <a:noFill/>
+        </p:spPr>
+        <p:txBody>
+          <a:bodyPr wrap="square">
+            <a:spAutoFit/>
+          </a:bodyPr>
+          <a:lstStyle/>
+          <a:p>
+            <a:pPr algn="l"/>
+            <a:r>
+              <a:rPr sz="1300" b="0" i="0">
+                <a:solidFill>
+                  <a:srgbClr val="1A222E"/>
+                </a:solidFill>
+              </a:rPr>
+              <a:t>• 任務太大、無中間驗證點：跑完 30 步後才發現第 3 步就偏了</a:t>
+            </a:r>
+          </a:p>
+        </p:txBody>
+      </p:sp>
+      <p:sp>
+        <p:nvSpPr>
+          <p:cNvPr id="12" name="TextBox 11"/>
+          <p:cNvSpPr txBox="1"/>
+          <p:nvPr/>
+        </p:nvSpPr>
+        <p:spPr>
+          <a:xfrm>
+            <a:off x="594360" y="2743200"/>
+            <a:ext cx="5166360" cy="384048"/>
+          </a:xfrm>
+          <a:prstGeom prst="rect">
+            <a:avLst/>
+          </a:prstGeom>
+          <a:noFill/>
+        </p:spPr>
+        <p:txBody>
+          <a:bodyPr wrap="square">
+            <a:spAutoFit/>
+          </a:bodyPr>
+          <a:lstStyle/>
+          <a:p>
+            <a:pPr algn="l"/>
+            <a:r>
+              <a:rPr sz="1300" b="0" i="0">
+                <a:solidFill>
+                  <a:srgbClr val="1A222E"/>
+                </a:solidFill>
+              </a:rPr>
+              <a:t>• 缺少 domain context：不知道你的慣例、架構決策、命名規範</a:t>
+            </a:r>
+          </a:p>
+        </p:txBody>
+      </p:sp>
+      <p:sp>
+        <p:nvSpPr>
+          <p:cNvPr id="13" name="TextBox 12"/>
+          <p:cNvSpPr txBox="1"/>
+          <p:nvPr/>
+        </p:nvSpPr>
+        <p:spPr>
+          <a:xfrm>
+            <a:off x="594360" y="3145536"/>
+            <a:ext cx="5166360" cy="384048"/>
+          </a:xfrm>
+          <a:prstGeom prst="rect">
+            <a:avLst/>
+          </a:prstGeom>
+          <a:noFill/>
+        </p:spPr>
+        <p:txBody>
+          <a:bodyPr wrap="square">
+            <a:spAutoFit/>
+          </a:bodyPr>
+          <a:lstStyle/>
+          <a:p>
+            <a:pPr algn="l"/>
+            <a:r>
+              <a:rPr sz="1300" b="0" i="0">
+                <a:solidFill>
+                  <a:srgbClr val="1A222E"/>
+                </a:solidFill>
+              </a:rPr>
+              <a:t>• 輸出難以驗證：沒有 test / lint，只能人眼審查，成本高</a:t>
+            </a:r>
+          </a:p>
+        </p:txBody>
+      </p:sp>
+      <p:sp>
+        <p:nvSpPr>
+          <p:cNvPr id="14" name="Rectangle 13"/>
+          <p:cNvSpPr/>
+          <p:nvPr/>
+        </p:nvSpPr>
+        <p:spPr>
+          <a:xfrm>
+            <a:off x="6336792" y="1600200"/>
+            <a:ext cx="5394960" cy="310896"/>
+          </a:xfrm>
+          <a:prstGeom prst="rect">
+            <a:avLst/>
+          </a:prstGeom>
+          <a:solidFill>
+            <a:srgbClr val="057A50"/>
+          </a:solidFill>
+          <a:ln>
+            <a:noFill/>
+          </a:ln>
+        </p:spPr>
+        <p:style>
+          <a:lnRef idx="1">
+            <a:schemeClr val="accent1"/>
+          </a:lnRef>
+          <a:fillRef idx="3">
+            <a:schemeClr val="accent1"/>
+          </a:fillRef>
+          <a:effectRef idx="2">
+            <a:schemeClr val="accent1"/>
+          </a:effectRef>
+          <a:fontRef idx="minor">
+            <a:schemeClr val="lt1"/>
+          </a:fontRef>
+        </p:style>
+        <p:txBody>
+          <a:bodyPr rtlCol="0" anchor="ctr"/>
+          <a:lstStyle/>
+          <a:p>
+            <a:pPr algn="ctr"/>
+          </a:p>
+        </p:txBody>
+      </p:sp>
+      <p:sp>
+        <p:nvSpPr>
+          <p:cNvPr id="15" name="TextBox 14"/>
+          <p:cNvSpPr txBox="1"/>
+          <p:nvPr/>
+        </p:nvSpPr>
+        <p:spPr>
+          <a:xfrm>
+            <a:off x="6473952" y="1627632"/>
+            <a:ext cx="5120640" cy="237744"/>
+          </a:xfrm>
+          <a:prstGeom prst="rect">
+            <a:avLst/>
+          </a:prstGeom>
+          <a:noFill/>
+        </p:spPr>
+        <p:txBody>
+          <a:bodyPr wrap="square">
+            <a:spAutoFit/>
+          </a:bodyPr>
+          <a:lstStyle/>
+          <a:p>
+            <a:pPr algn="l"/>
+            <a:r>
+              <a:rPr sz="1300" b="1" i="0">
+                <a:solidFill>
+                  <a:srgbClr val="FFFFFF"/>
+                </a:solidFill>
+              </a:rPr>
+              <a:t>怎麼讓溝通成本 &lt; 實作成本</a:t>
+            </a:r>
+          </a:p>
+        </p:txBody>
+      </p:sp>
+      <p:sp>
+        <p:nvSpPr>
+          <p:cNvPr id="16" name="TextBox 15"/>
+          <p:cNvSpPr txBox="1"/>
+          <p:nvPr/>
+        </p:nvSpPr>
+        <p:spPr>
+          <a:xfrm>
+            <a:off x="6473952" y="1938528"/>
+            <a:ext cx="5166360" cy="384048"/>
+          </a:xfrm>
+          <a:prstGeom prst="rect">
+            <a:avLst/>
+          </a:prstGeom>
+          <a:noFill/>
+        </p:spPr>
+        <p:txBody>
+          <a:bodyPr wrap="square">
+            <a:spAutoFit/>
+          </a:bodyPr>
+          <a:lstStyle/>
+          <a:p>
+            <a:pPr algn="l"/>
+            <a:r>
+              <a:rPr sz="1300" b="0" i="0">
+                <a:solidFill>
+                  <a:srgbClr val="1A222E"/>
+                </a:solidFill>
+              </a:rPr>
+              <a:t>• 任務要有明確完成條件：描述結果，不是描述方向</a:t>
+            </a:r>
+          </a:p>
+        </p:txBody>
+      </p:sp>
+      <p:sp>
+        <p:nvSpPr>
+          <p:cNvPr id="17" name="TextBox 16"/>
+          <p:cNvSpPr txBox="1"/>
+          <p:nvPr/>
+        </p:nvSpPr>
+        <p:spPr>
+          <a:xfrm>
+            <a:off x="6473952" y="2340864"/>
+            <a:ext cx="5166360" cy="384048"/>
+          </a:xfrm>
+          <a:prstGeom prst="rect">
+            <a:avLst/>
+          </a:prstGeom>
+          <a:noFill/>
+        </p:spPr>
+        <p:txBody>
+          <a:bodyPr wrap="square">
+            <a:spAutoFit/>
+          </a:bodyPr>
+          <a:lstStyle/>
+          <a:p>
+            <a:pPr algn="l"/>
+            <a:r>
+              <a:rPr sz="1300" b="0" i="0">
+                <a:solidFill>
+                  <a:srgbClr val="1A222E"/>
+                </a:solidFill>
+              </a:rPr>
+              <a:t>• 小步驟迭代：每一輪確認方向正確再繼續，不要一次丟大任務</a:t>
+            </a:r>
+          </a:p>
+        </p:txBody>
+      </p:sp>
+      <p:sp>
+        <p:nvSpPr>
+          <p:cNvPr id="18" name="TextBox 17"/>
+          <p:cNvSpPr txBox="1"/>
+          <p:nvPr/>
+        </p:nvSpPr>
+        <p:spPr>
+          <a:xfrm>
+            <a:off x="6473952" y="2743200"/>
+            <a:ext cx="5166360" cy="384048"/>
+          </a:xfrm>
+          <a:prstGeom prst="rect">
+            <a:avLst/>
+          </a:prstGeom>
+          <a:noFill/>
+        </p:spPr>
+        <p:txBody>
+          <a:bodyPr wrap="square">
+            <a:spAutoFit/>
+          </a:bodyPr>
+          <a:lstStyle/>
+          <a:p>
+            <a:pPr algn="l"/>
+            <a:r>
+              <a:rPr sz="1300" b="0" i="0">
+                <a:solidFill>
+                  <a:srgbClr val="1A222E"/>
+                </a:solidFill>
+              </a:rPr>
+              <a:t>• 前置 context：CLAUDE.md、範例、架構說明先給好，不要讓 Agent 猜</a:t>
+            </a:r>
+          </a:p>
+        </p:txBody>
+      </p:sp>
+      <p:sp>
+        <p:nvSpPr>
+          <p:cNvPr id="19" name="TextBox 18"/>
+          <p:cNvSpPr txBox="1"/>
+          <p:nvPr/>
+        </p:nvSpPr>
+        <p:spPr>
+          <a:xfrm>
+            <a:off x="6473952" y="3145536"/>
+            <a:ext cx="5166360" cy="384048"/>
+          </a:xfrm>
+          <a:prstGeom prst="rect">
+            <a:avLst/>
+          </a:prstGeom>
+          <a:noFill/>
+        </p:spPr>
+        <p:txBody>
+          <a:bodyPr wrap="square">
+            <a:spAutoFit/>
+          </a:bodyPr>
+          <a:lstStyle/>
+          <a:p>
+            <a:pPr algn="l"/>
+            <a:r>
+              <a:rPr sz="1300" b="0" i="0">
+                <a:solidFill>
+                  <a:srgbClr val="1A222E"/>
+                </a:solidFill>
+              </a:rPr>
+              <a:t>• 有驗證機制：能跑測試才能自我修正；不能驗證的風險轉嫁給你</a:t>
+            </a:r>
+          </a:p>
+        </p:txBody>
+      </p:sp>
+      <p:sp>
+        <p:nvSpPr>
+          <p:cNvPr id="20" name="Rectangle 19"/>
+          <p:cNvSpPr/>
+          <p:nvPr/>
+        </p:nvSpPr>
+        <p:spPr>
+          <a:xfrm>
+            <a:off x="457200" y="3639312"/>
+            <a:ext cx="11274552" cy="41148"/>
+          </a:xfrm>
+          <a:prstGeom prst="rect">
+            <a:avLst/>
+          </a:prstGeom>
+          <a:solidFill>
+            <a:srgbClr val="E2E8F0"/>
+          </a:solidFill>
+          <a:ln>
+            <a:noFill/>
+          </a:ln>
+        </p:spPr>
+        <p:style>
+          <a:lnRef idx="1">
+            <a:schemeClr val="accent1"/>
+          </a:lnRef>
+          <a:fillRef idx="3">
+            <a:schemeClr val="accent1"/>
+          </a:fillRef>
+          <a:effectRef idx="2">
+            <a:schemeClr val="accent1"/>
+          </a:effectRef>
+          <a:fontRef idx="minor">
+            <a:schemeClr val="lt1"/>
+          </a:fontRef>
+        </p:style>
+        <p:txBody>
+          <a:bodyPr rtlCol="0" anchor="ctr"/>
+          <a:lstStyle/>
+          <a:p>
+            <a:pPr algn="ctr"/>
+          </a:p>
+        </p:txBody>
+      </p:sp>
+      <p:sp>
+        <p:nvSpPr>
+          <p:cNvPr id="21" name="Rectangle 20"/>
+          <p:cNvSpPr/>
+          <p:nvPr/>
+        </p:nvSpPr>
+        <p:spPr>
+          <a:xfrm>
+            <a:off x="457200" y="3749039"/>
+            <a:ext cx="11274552" cy="475488"/>
+          </a:xfrm>
+          <a:prstGeom prst="rect">
+            <a:avLst/>
+          </a:prstGeom>
+          <a:solidFill>
+            <a:srgbClr val="F8FAFC"/>
+          </a:solidFill>
+          <a:ln>
+            <a:noFill/>
+          </a:ln>
+        </p:spPr>
+        <p:style>
+          <a:lnRef idx="1">
+            <a:schemeClr val="accent1"/>
+          </a:lnRef>
+          <a:fillRef idx="3">
+            <a:schemeClr val="accent1"/>
+          </a:fillRef>
+          <a:effectRef idx="2">
+            <a:schemeClr val="accent1"/>
+          </a:effectRef>
+          <a:fontRef idx="minor">
+            <a:schemeClr val="lt1"/>
+          </a:fontRef>
+        </p:style>
+        <p:txBody>
+          <a:bodyPr rtlCol="0" anchor="ctr"/>
+          <a:lstStyle/>
+          <a:p>
+            <a:pPr algn="ctr"/>
+          </a:p>
+        </p:txBody>
+      </p:sp>
+      <p:sp>
+        <p:nvSpPr>
+          <p:cNvPr id="22" name="TextBox 21"/>
+          <p:cNvSpPr txBox="1"/>
+          <p:nvPr/>
+        </p:nvSpPr>
+        <p:spPr>
+          <a:xfrm>
+            <a:off x="621792" y="3822191"/>
+            <a:ext cx="10972800" cy="329184"/>
+          </a:xfrm>
+          <a:prstGeom prst="rect">
+            <a:avLst/>
+          </a:prstGeom>
+          <a:noFill/>
+        </p:spPr>
+        <p:txBody>
+          <a:bodyPr wrap="square">
+            <a:spAutoFit/>
+          </a:bodyPr>
+          <a:lstStyle/>
+          <a:p>
+            <a:pPr algn="l"/>
+            <a:r>
+              <a:rPr sz="1500" b="1" i="0">
+                <a:solidFill>
+                  <a:srgbClr val="1A222E"/>
+                </a:solidFill>
+              </a:rPr>
+              <a:t>Code Agent 的收益是真的，但前提是：任務描述清楚 + 驗證結果的成本夠低</a:t>
+            </a:r>
+          </a:p>
+        </p:txBody>
+      </p:sp>
+    </p:spTree>
+  </p:cSld>
+  <p:clrMapOvr>
+    <a:masterClrMapping/>
+  </p:clrMapOvr>
+</p:sld>
+</file>
+
+<file path=ppt/slides/slide25.xml><?xml version="1.0" encoding="utf-8"?>
 <p:sld xmlns:a="http://schemas.openxmlformats.org/drawingml/2006/main" xmlns:p="http://schemas.openxmlformats.org/presentationml/2006/main" xmlns:r="http://schemas.openxmlformats.org/officeDocument/2006/relationships">
   <p:cSld>
     <p:bg>

--- a/claude_code_full.pptx
+++ b/claude_code_full.pptx
@@ -4206,22 +4206,22 @@
         <p:spPr>
           <a:xfrm>
             <a:off x="502920" y="2450592"/>
-            <a:ext cx="11155680" cy="457200"/>
-          </a:xfrm>
-          <a:prstGeom prst="rect">
-            <a:avLst/>
-          </a:prstGeom>
-          <a:noFill/>
-        </p:spPr>
-        <p:txBody>
-          <a:bodyPr wrap="square">
-            <a:spAutoFit/>
-          </a:bodyPr>
-          <a:lstStyle/>
-          <a:p>
-            <a:pPr algn="l"/>
-            <a:r>
-              <a:rPr sz="1700" b="0" i="0">
+            <a:ext cx="11155680" cy="420624"/>
+          </a:xfrm>
+          <a:prstGeom prst="rect">
+            <a:avLst/>
+          </a:prstGeom>
+          <a:noFill/>
+        </p:spPr>
+        <p:txBody>
+          <a:bodyPr wrap="square">
+            <a:spAutoFit/>
+          </a:bodyPr>
+          <a:lstStyle/>
+          <a:p>
+            <a:pPr algn="l"/>
+            <a:r>
+              <a:rPr sz="1600" b="0" i="0">
                 <a:solidFill>
                   <a:srgbClr val="1A222E"/>
                 </a:solidFill>
@@ -4239,28 +4239,28 @@
         </p:nvSpPr>
         <p:spPr>
           <a:xfrm>
-            <a:off x="502920" y="2907792"/>
-            <a:ext cx="11155680" cy="457200"/>
-          </a:xfrm>
-          <a:prstGeom prst="rect">
-            <a:avLst/>
-          </a:prstGeom>
-          <a:noFill/>
-        </p:spPr>
-        <p:txBody>
-          <a:bodyPr wrap="square">
-            <a:spAutoFit/>
-          </a:bodyPr>
-          <a:lstStyle/>
-          <a:p>
-            <a:pPr algn="l"/>
-            <a:r>
-              <a:rPr sz="1700" b="0" i="0">
+            <a:off x="502920" y="2871216"/>
+            <a:ext cx="11155680" cy="420624"/>
+          </a:xfrm>
+          <a:prstGeom prst="rect">
+            <a:avLst/>
+          </a:prstGeom>
+          <a:noFill/>
+        </p:spPr>
+        <p:txBody>
+          <a:bodyPr wrap="square">
+            <a:spAutoFit/>
+          </a:bodyPr>
+          <a:lstStyle/>
+          <a:p>
+            <a:pPr algn="l"/>
+            <a:r>
+              <a:rPr sz="1600" b="0" i="0">
                 <a:solidFill>
                   <a:srgbClr val="1A222E"/>
                 </a:solidFill>
               </a:rPr>
-              <a:t>• 多個 tool_use 批次發出 → 平行執行 → 所有結果一起回來 → 才進行下一次推理</a:t>
+              <a:t>• 多個 tool_use 批次發出 → 所有結果一起回來 → 才進行下一次推理</a:t>
             </a:r>
           </a:p>
         </p:txBody>
@@ -4273,23 +4273,91 @@
         </p:nvSpPr>
         <p:spPr>
           <a:xfrm>
-            <a:off x="502920" y="3364992"/>
-            <a:ext cx="11155680" cy="457200"/>
-          </a:xfrm>
-          <a:prstGeom prst="rect">
-            <a:avLst/>
-          </a:prstGeom>
-          <a:noFill/>
-        </p:spPr>
-        <p:txBody>
-          <a:bodyPr wrap="square">
-            <a:spAutoFit/>
-          </a:bodyPr>
-          <a:lstStyle/>
-          <a:p>
-            <a:pPr algn="l"/>
-            <a:r>
-              <a:rPr sz="1700" b="0" i="0">
+            <a:off x="502920" y="3291840"/>
+            <a:ext cx="11155680" cy="420624"/>
+          </a:xfrm>
+          <a:prstGeom prst="rect">
+            <a:avLst/>
+          </a:prstGeom>
+          <a:noFill/>
+        </p:spPr>
+        <p:txBody>
+          <a:bodyPr wrap="square">
+            <a:spAutoFit/>
+          </a:bodyPr>
+          <a:lstStyle/>
+          <a:p>
+            <a:pPr algn="l"/>
+            <a:r>
+              <a:rPr sz="1400" b="0" i="0">
+                <a:solidFill>
+                  <a:srgbClr val="55657A"/>
+                </a:solidFill>
+              </a:rPr>
+              <a:t>    • 唯讀工具（Read / Glob / Grep）isConcurrencySafe=true → 真正平行執行（binary 實測）</a:t>
+            </a:r>
+          </a:p>
+        </p:txBody>
+      </p:sp>
+      <p:sp>
+        <p:nvSpPr>
+          <p:cNvPr id="27" name="TextBox 26"/>
+          <p:cNvSpPr txBox="1"/>
+          <p:nvPr/>
+        </p:nvSpPr>
+        <p:spPr>
+          <a:xfrm>
+            <a:off x="502920" y="3712464"/>
+            <a:ext cx="11155680" cy="420624"/>
+          </a:xfrm>
+          <a:prstGeom prst="rect">
+            <a:avLst/>
+          </a:prstGeom>
+          <a:noFill/>
+        </p:spPr>
+        <p:txBody>
+          <a:bodyPr wrap="square">
+            <a:spAutoFit/>
+          </a:bodyPr>
+          <a:lstStyle/>
+          <a:p>
+            <a:pPr algn="l"/>
+            <a:r>
+              <a:rPr sz="1400" b="0" i="0">
+                <a:solidFill>
+                  <a:srgbClr val="55657A"/>
+                </a:solidFill>
+              </a:rPr>
+              <a:t>    • 寫入工具（Write / Edit 等）isConcurrencySafe=false → 遇到即停，單獨執行後再繼續</a:t>
+            </a:r>
+          </a:p>
+        </p:txBody>
+      </p:sp>
+      <p:sp>
+        <p:nvSpPr>
+          <p:cNvPr id="28" name="TextBox 27"/>
+          <p:cNvSpPr txBox="1"/>
+          <p:nvPr/>
+        </p:nvSpPr>
+        <p:spPr>
+          <a:xfrm>
+            <a:off x="502920" y="4133088"/>
+            <a:ext cx="11155680" cy="420624"/>
+          </a:xfrm>
+          <a:prstGeom prst="rect">
+            <a:avLst/>
+          </a:prstGeom>
+          <a:noFill/>
+        </p:spPr>
+        <p:txBody>
+          <a:bodyPr wrap="square">
+            <a:spAutoFit/>
+          </a:bodyPr>
+          <a:lstStyle/>
+          <a:p>
+            <a:pPr algn="l"/>
+            <a:r>
+              <a:rPr sz="1600" b="0" i="0">
                 <a:solidFill>
                   <a:srgbClr val="1A222E"/>
                 </a:solidFill>
@@ -4301,29 +4369,29 @@
       </p:sp>
       <p:sp>
         <p:nvSpPr>
-          <p:cNvPr id="27" name="TextBox 26"/>
-          <p:cNvSpPr txBox="1"/>
-          <p:nvPr/>
-        </p:nvSpPr>
-        <p:spPr>
-          <a:xfrm>
-            <a:off x="502920" y="3822191"/>
-            <a:ext cx="11155680" cy="457200"/>
-          </a:xfrm>
-          <a:prstGeom prst="rect">
-            <a:avLst/>
-          </a:prstGeom>
-          <a:noFill/>
-        </p:spPr>
-        <p:txBody>
-          <a:bodyPr wrap="square">
-            <a:spAutoFit/>
-          </a:bodyPr>
-          <a:lstStyle/>
-          <a:p>
-            <a:pPr algn="l"/>
-            <a:r>
-              <a:rPr sz="1700" b="0" i="0">
+          <p:cNvPr id="29" name="TextBox 28"/>
+          <p:cNvSpPr txBox="1"/>
+          <p:nvPr/>
+        </p:nvSpPr>
+        <p:spPr>
+          <a:xfrm>
+            <a:off x="502920" y="4553712"/>
+            <a:ext cx="11155680" cy="420624"/>
+          </a:xfrm>
+          <a:prstGeom prst="rect">
+            <a:avLst/>
+          </a:prstGeom>
+          <a:noFill/>
+        </p:spPr>
+        <p:txBody>
+          <a:bodyPr wrap="square">
+            <a:spAutoFit/>
+          </a:bodyPr>
+          <a:lstStyle/>
+          <a:p>
+            <a:pPr algn="l"/>
+            <a:r>
+              <a:rPr sz="1600" b="0" i="0">
                 <a:solidFill>
                   <a:srgbClr val="1A222E"/>
                 </a:solidFill>
@@ -4335,29 +4403,29 @@
       </p:sp>
       <p:sp>
         <p:nvSpPr>
-          <p:cNvPr id="28" name="TextBox 27"/>
-          <p:cNvSpPr txBox="1"/>
-          <p:nvPr/>
-        </p:nvSpPr>
-        <p:spPr>
-          <a:xfrm>
-            <a:off x="502920" y="4279392"/>
-            <a:ext cx="11155680" cy="457200"/>
-          </a:xfrm>
-          <a:prstGeom prst="rect">
-            <a:avLst/>
-          </a:prstGeom>
-          <a:noFill/>
-        </p:spPr>
-        <p:txBody>
-          <a:bodyPr wrap="square">
-            <a:spAutoFit/>
-          </a:bodyPr>
-          <a:lstStyle/>
-          <a:p>
-            <a:pPr algn="l"/>
-            <a:r>
-              <a:rPr sz="1700" b="0" i="0">
+          <p:cNvPr id="30" name="TextBox 29"/>
+          <p:cNvSpPr txBox="1"/>
+          <p:nvPr/>
+        </p:nvSpPr>
+        <p:spPr>
+          <a:xfrm>
+            <a:off x="502920" y="4974336"/>
+            <a:ext cx="11155680" cy="420624"/>
+          </a:xfrm>
+          <a:prstGeom prst="rect">
+            <a:avLst/>
+          </a:prstGeom>
+          <a:noFill/>
+        </p:spPr>
+        <p:txBody>
+          <a:bodyPr wrap="square">
+            <a:spAutoFit/>
+          </a:bodyPr>
+          <a:lstStyle/>
+          <a:p>
+            <a:pPr algn="l"/>
+            <a:r>
+              <a:rPr sz="1600" b="0" i="0">
                 <a:solidFill>
                   <a:srgbClr val="1A222E"/>
                 </a:solidFill>
@@ -16047,7 +16115,7 @@
                   <a:srgbClr val="1A222E"/>
                 </a:solidFill>
               </a:rPr>
-              <a:t>• Claude 先 ToolSearch 載入 Skill schema，再呼叫 Skill("name", args)</a:t>
+              <a:t>• Skill 是預載工具，Claude 可直接呼叫 Skill("name", args)，不需 ToolSearch</a:t>
             </a:r>
           </a:p>
         </p:txBody>
